--- a/public/files/media-pembelajaran/Media Pembelajaran Pertemuan 4.pptx
+++ b/public/files/media-pembelajaran/Media Pembelajaran Pertemuan 4.pptx
@@ -1,33 +1,33 @@
 
 <file path=ppt/presentation.xml><?xml version="1.0" encoding="utf-8"?>
-<p:presentation xmlns:a="http://schemas.openxmlformats.org/drawingml/2006/main" xmlns:r="http://schemas.openxmlformats.org/officeDocument/2006/relationships" xmlns:p="http://schemas.openxmlformats.org/presentationml/2006/main" saveSubsetFonts="1" embedTrueTypeFonts="true">
+<p:presentation xmlns:a="http://schemas.openxmlformats.org/drawingml/2006/main" xmlns:r="http://schemas.openxmlformats.org/officeDocument/2006/relationships" xmlns:p="http://schemas.openxmlformats.org/presentationml/2006/main" embedTrueTypeFonts="1" saveSubsetFonts="1">
   <p:sldMasterIdLst>
     <p:sldMasterId id="2147483648" r:id="rId1"/>
   </p:sldMasterIdLst>
   <p:sldIdLst>
-    <p:sldId id="256" r:id="rId6"/>
-    <p:sldId id="257" r:id="rId7"/>
-    <p:sldId id="258" r:id="rId8"/>
-    <p:sldId id="259" r:id="rId9"/>
-    <p:sldId id="260" r:id="rId10"/>
-    <p:sldId id="261" r:id="rId11"/>
-    <p:sldId id="262" r:id="rId12"/>
-    <p:sldId id="263" r:id="rId13"/>
-    <p:sldId id="264" r:id="rId14"/>
-    <p:sldId id="265" r:id="rId15"/>
-    <p:sldId id="266" r:id="rId16"/>
-    <p:sldId id="267" r:id="rId17"/>
+    <p:sldId id="256" r:id="rId2"/>
+    <p:sldId id="257" r:id="rId3"/>
+    <p:sldId id="258" r:id="rId4"/>
+    <p:sldId id="259" r:id="rId5"/>
+    <p:sldId id="260" r:id="rId6"/>
+    <p:sldId id="261" r:id="rId7"/>
+    <p:sldId id="262" r:id="rId8"/>
+    <p:sldId id="263" r:id="rId9"/>
+    <p:sldId id="264" r:id="rId10"/>
+    <p:sldId id="265" r:id="rId11"/>
+    <p:sldId id="266" r:id="rId12"/>
+    <p:sldId id="267" r:id="rId13"/>
   </p:sldIdLst>
   <p:sldSz cx="18288000" cy="10287000"/>
   <p:notesSz cx="6858000" cy="9144000"/>
   <p:embeddedFontLst>
     <p:embeddedFont>
-      <p:font typeface="Poppins Bold" charset="1" panose="00000800000000000000"/>
-      <p:regular r:id="rId18"/>
+      <p:font typeface="Poppins" panose="00000500000000000000" pitchFamily="2" charset="0"/>
+      <p:regular r:id="rId14"/>
     </p:embeddedFont>
     <p:embeddedFont>
-      <p:font typeface="Poppins" charset="1" panose="00000500000000000000"/>
-      <p:regular r:id="rId19"/>
+      <p:font typeface="Poppins Bold" panose="00000800000000000000" charset="0"/>
+      <p:regular r:id="rId15"/>
     </p:embeddedFont>
   </p:embeddedFontLst>
   <p:defaultTextStyle>
@@ -125,6 +125,22 @@
       </a:defRPr>
     </a:lvl9pPr>
   </p:defaultTextStyle>
+  <p:extLst>
+    <p:ext uri="{EFAFB233-063F-42B5-8137-9DF3F51BA10A}">
+      <p15:sldGuideLst xmlns:p15="http://schemas.microsoft.com/office/powerpoint/2012/main">
+        <p15:guide id="1" orient="horz" pos="2160">
+          <p15:clr>
+            <a:srgbClr val="A4A3A4"/>
+          </p15:clr>
+        </p15:guide>
+        <p15:guide id="2" pos="2880">
+          <p15:clr>
+            <a:srgbClr val="A4A3A4"/>
+          </p15:clr>
+        </p15:guide>
+      </p15:sldGuideLst>
+    </p:ext>
+  </p:extLst>
 </p:presentation>
 </file>
 
@@ -166,10 +182,9 @@
           <a:lstStyle/>
           <a:p>
             <a:r>
-              <a:rPr lang="en-US" smtClean="0"/>
+              <a:rPr lang="en-US"/>
               <a:t>Click to edit Master title style</a:t>
             </a:r>
-            <a:endParaRPr lang="en-US"/>
           </a:p>
         </p:txBody>
       </p:sp>
@@ -285,10 +300,9 @@
           </a:lstStyle>
           <a:p>
             <a:r>
-              <a:rPr lang="en-US" smtClean="0"/>
+              <a:rPr lang="en-US"/>
               <a:t>Click to edit Master subtitle style</a:t>
             </a:r>
-            <a:endParaRPr lang="en-US"/>
           </a:p>
         </p:txBody>
       </p:sp>
@@ -310,7 +324,7 @@
             <a:fld id="{1D8BD707-D9CF-40AE-B4C6-C98DA3205C09}" type="datetimeFigureOut">
               <a:rPr lang="en-US" smtClean="0"/>
               <a:pPr/>
-              <a:t>8/1/2011</a:t>
+              <a:t>4/29/2026</a:t>
             </a:fld>
             <a:endParaRPr lang="en-US"/>
           </a:p>
@@ -400,10 +414,9 @@
           <a:lstStyle/>
           <a:p>
             <a:r>
-              <a:rPr lang="en-US" smtClean="0"/>
+              <a:rPr lang="en-US"/>
               <a:t>Click to edit Master title style</a:t>
             </a:r>
-            <a:endParaRPr lang="en-US"/>
           </a:p>
         </p:txBody>
       </p:sp>
@@ -424,38 +437,37 @@
           <a:p>
             <a:pPr lvl="0"/>
             <a:r>
-              <a:rPr lang="en-US" smtClean="0"/>
+              <a:rPr lang="en-US"/>
               <a:t>Click to edit Master text styles</a:t>
             </a:r>
           </a:p>
           <a:p>
             <a:pPr lvl="1"/>
             <a:r>
-              <a:rPr lang="en-US" smtClean="0"/>
+              <a:rPr lang="en-US"/>
               <a:t>Second level</a:t>
             </a:r>
           </a:p>
           <a:p>
             <a:pPr lvl="2"/>
             <a:r>
-              <a:rPr lang="en-US" smtClean="0"/>
+              <a:rPr lang="en-US"/>
               <a:t>Third level</a:t>
             </a:r>
           </a:p>
           <a:p>
             <a:pPr lvl="3"/>
             <a:r>
-              <a:rPr lang="en-US" smtClean="0"/>
+              <a:rPr lang="en-US"/>
               <a:t>Fourth level</a:t>
             </a:r>
           </a:p>
           <a:p>
             <a:pPr lvl="4"/>
             <a:r>
-              <a:rPr lang="en-US" smtClean="0"/>
+              <a:rPr lang="en-US"/>
               <a:t>Fifth level</a:t>
             </a:r>
-            <a:endParaRPr lang="en-US"/>
           </a:p>
         </p:txBody>
       </p:sp>
@@ -477,7 +489,7 @@
             <a:fld id="{1D8BD707-D9CF-40AE-B4C6-C98DA3205C09}" type="datetimeFigureOut">
               <a:rPr lang="en-US" smtClean="0"/>
               <a:pPr/>
-              <a:t>8/1/2011</a:t>
+              <a:t>4/29/2026</a:t>
             </a:fld>
             <a:endParaRPr lang="en-US"/>
           </a:p>
@@ -572,10 +584,9 @@
           <a:lstStyle/>
           <a:p>
             <a:r>
-              <a:rPr lang="en-US" smtClean="0"/>
+              <a:rPr lang="en-US"/>
               <a:t>Click to edit Master title style</a:t>
             </a:r>
-            <a:endParaRPr lang="en-US"/>
           </a:p>
         </p:txBody>
       </p:sp>
@@ -601,38 +612,37 @@
           <a:p>
             <a:pPr lvl="0"/>
             <a:r>
-              <a:rPr lang="en-US" smtClean="0"/>
+              <a:rPr lang="en-US"/>
               <a:t>Click to edit Master text styles</a:t>
             </a:r>
           </a:p>
           <a:p>
             <a:pPr lvl="1"/>
             <a:r>
-              <a:rPr lang="en-US" smtClean="0"/>
+              <a:rPr lang="en-US"/>
               <a:t>Second level</a:t>
             </a:r>
           </a:p>
           <a:p>
             <a:pPr lvl="2"/>
             <a:r>
-              <a:rPr lang="en-US" smtClean="0"/>
+              <a:rPr lang="en-US"/>
               <a:t>Third level</a:t>
             </a:r>
           </a:p>
           <a:p>
             <a:pPr lvl="3"/>
             <a:r>
-              <a:rPr lang="en-US" smtClean="0"/>
+              <a:rPr lang="en-US"/>
               <a:t>Fourth level</a:t>
             </a:r>
           </a:p>
           <a:p>
             <a:pPr lvl="4"/>
             <a:r>
-              <a:rPr lang="en-US" smtClean="0"/>
+              <a:rPr lang="en-US"/>
               <a:t>Fifth level</a:t>
             </a:r>
-            <a:endParaRPr lang="en-US"/>
           </a:p>
         </p:txBody>
       </p:sp>
@@ -654,7 +664,7 @@
             <a:fld id="{1D8BD707-D9CF-40AE-B4C6-C98DA3205C09}" type="datetimeFigureOut">
               <a:rPr lang="en-US" smtClean="0"/>
               <a:pPr/>
-              <a:t>8/1/2011</a:t>
+              <a:t>4/29/2026</a:t>
             </a:fld>
             <a:endParaRPr lang="en-US"/>
           </a:p>
@@ -744,10 +754,9 @@
           <a:lstStyle/>
           <a:p>
             <a:r>
-              <a:rPr lang="en-US" smtClean="0"/>
+              <a:rPr lang="en-US"/>
               <a:t>Click to edit Master title style</a:t>
             </a:r>
-            <a:endParaRPr lang="en-US"/>
           </a:p>
         </p:txBody>
       </p:sp>
@@ -768,38 +777,37 @@
           <a:p>
             <a:pPr lvl="0"/>
             <a:r>
-              <a:rPr lang="en-US" smtClean="0"/>
+              <a:rPr lang="en-US"/>
               <a:t>Click to edit Master text styles</a:t>
             </a:r>
           </a:p>
           <a:p>
             <a:pPr lvl="1"/>
             <a:r>
-              <a:rPr lang="en-US" smtClean="0"/>
+              <a:rPr lang="en-US"/>
               <a:t>Second level</a:t>
             </a:r>
           </a:p>
           <a:p>
             <a:pPr lvl="2"/>
             <a:r>
-              <a:rPr lang="en-US" smtClean="0"/>
+              <a:rPr lang="en-US"/>
               <a:t>Third level</a:t>
             </a:r>
           </a:p>
           <a:p>
             <a:pPr lvl="3"/>
             <a:r>
-              <a:rPr lang="en-US" smtClean="0"/>
+              <a:rPr lang="en-US"/>
               <a:t>Fourth level</a:t>
             </a:r>
           </a:p>
           <a:p>
             <a:pPr lvl="4"/>
             <a:r>
-              <a:rPr lang="en-US" smtClean="0"/>
+              <a:rPr lang="en-US"/>
               <a:t>Fifth level</a:t>
             </a:r>
-            <a:endParaRPr lang="en-US"/>
           </a:p>
         </p:txBody>
       </p:sp>
@@ -821,7 +829,7 @@
             <a:fld id="{1D8BD707-D9CF-40AE-B4C6-C98DA3205C09}" type="datetimeFigureOut">
               <a:rPr lang="en-US" smtClean="0"/>
               <a:pPr/>
-              <a:t>8/1/2011</a:t>
+              <a:t>4/29/2026</a:t>
             </a:fld>
             <a:endParaRPr lang="en-US"/>
           </a:p>
@@ -920,10 +928,9 @@
           </a:lstStyle>
           <a:p>
             <a:r>
-              <a:rPr lang="en-US" smtClean="0"/>
+              <a:rPr lang="en-US"/>
               <a:t>Click to edit Master title style</a:t>
             </a:r>
-            <a:endParaRPr lang="en-US"/>
           </a:p>
         </p:txBody>
       </p:sp>
@@ -1040,7 +1047,7 @@
           <a:p>
             <a:pPr lvl="0"/>
             <a:r>
-              <a:rPr lang="en-US" smtClean="0"/>
+              <a:rPr lang="en-US"/>
               <a:t>Click to edit Master text styles</a:t>
             </a:r>
           </a:p>
@@ -1064,7 +1071,7 @@
             <a:fld id="{1D8BD707-D9CF-40AE-B4C6-C98DA3205C09}" type="datetimeFigureOut">
               <a:rPr lang="en-US" smtClean="0"/>
               <a:pPr/>
-              <a:t>8/1/2011</a:t>
+              <a:t>4/29/2026</a:t>
             </a:fld>
             <a:endParaRPr lang="en-US"/>
           </a:p>
@@ -1154,10 +1161,9 @@
           <a:lstStyle/>
           <a:p>
             <a:r>
-              <a:rPr lang="en-US" smtClean="0"/>
+              <a:rPr lang="en-US"/>
               <a:t>Click to edit Master title style</a:t>
             </a:r>
-            <a:endParaRPr lang="en-US"/>
           </a:p>
         </p:txBody>
       </p:sp>
@@ -1211,38 +1217,37 @@
           <a:p>
             <a:pPr lvl="0"/>
             <a:r>
-              <a:rPr lang="en-US" smtClean="0"/>
+              <a:rPr lang="en-US"/>
               <a:t>Click to edit Master text styles</a:t>
             </a:r>
           </a:p>
           <a:p>
             <a:pPr lvl="1"/>
             <a:r>
-              <a:rPr lang="en-US" smtClean="0"/>
+              <a:rPr lang="en-US"/>
               <a:t>Second level</a:t>
             </a:r>
           </a:p>
           <a:p>
             <a:pPr lvl="2"/>
             <a:r>
-              <a:rPr lang="en-US" smtClean="0"/>
+              <a:rPr lang="en-US"/>
               <a:t>Third level</a:t>
             </a:r>
           </a:p>
           <a:p>
             <a:pPr lvl="3"/>
             <a:r>
-              <a:rPr lang="en-US" smtClean="0"/>
+              <a:rPr lang="en-US"/>
               <a:t>Fourth level</a:t>
             </a:r>
           </a:p>
           <a:p>
             <a:pPr lvl="4"/>
             <a:r>
-              <a:rPr lang="en-US" smtClean="0"/>
+              <a:rPr lang="en-US"/>
               <a:t>Fifth level</a:t>
             </a:r>
-            <a:endParaRPr lang="en-US"/>
           </a:p>
         </p:txBody>
       </p:sp>
@@ -1296,38 +1301,37 @@
           <a:p>
             <a:pPr lvl="0"/>
             <a:r>
-              <a:rPr lang="en-US" smtClean="0"/>
+              <a:rPr lang="en-US"/>
               <a:t>Click to edit Master text styles</a:t>
             </a:r>
           </a:p>
           <a:p>
             <a:pPr lvl="1"/>
             <a:r>
-              <a:rPr lang="en-US" smtClean="0"/>
+              <a:rPr lang="en-US"/>
               <a:t>Second level</a:t>
             </a:r>
           </a:p>
           <a:p>
             <a:pPr lvl="2"/>
             <a:r>
-              <a:rPr lang="en-US" smtClean="0"/>
+              <a:rPr lang="en-US"/>
               <a:t>Third level</a:t>
             </a:r>
           </a:p>
           <a:p>
             <a:pPr lvl="3"/>
             <a:r>
-              <a:rPr lang="en-US" smtClean="0"/>
+              <a:rPr lang="en-US"/>
               <a:t>Fourth level</a:t>
             </a:r>
           </a:p>
           <a:p>
             <a:pPr lvl="4"/>
             <a:r>
-              <a:rPr lang="en-US" smtClean="0"/>
+              <a:rPr lang="en-US"/>
               <a:t>Fifth level</a:t>
             </a:r>
-            <a:endParaRPr lang="en-US"/>
           </a:p>
         </p:txBody>
       </p:sp>
@@ -1349,7 +1353,7 @@
             <a:fld id="{1D8BD707-D9CF-40AE-B4C6-C98DA3205C09}" type="datetimeFigureOut">
               <a:rPr lang="en-US" smtClean="0"/>
               <a:pPr/>
-              <a:t>8/1/2011</a:t>
+              <a:t>4/29/2026</a:t>
             </a:fld>
             <a:endParaRPr lang="en-US"/>
           </a:p>
@@ -1443,10 +1447,9 @@
           </a:lstStyle>
           <a:p>
             <a:r>
-              <a:rPr lang="en-US" smtClean="0"/>
+              <a:rPr lang="en-US"/>
               <a:t>Click to edit Master title style</a:t>
             </a:r>
-            <a:endParaRPr lang="en-US"/>
           </a:p>
         </p:txBody>
       </p:sp>
@@ -1509,7 +1512,7 @@
           <a:p>
             <a:pPr lvl="0"/>
             <a:r>
-              <a:rPr lang="en-US" smtClean="0"/>
+              <a:rPr lang="en-US"/>
               <a:t>Click to edit Master text styles</a:t>
             </a:r>
           </a:p>
@@ -1565,38 +1568,37 @@
           <a:p>
             <a:pPr lvl="0"/>
             <a:r>
-              <a:rPr lang="en-US" smtClean="0"/>
+              <a:rPr lang="en-US"/>
               <a:t>Click to edit Master text styles</a:t>
             </a:r>
           </a:p>
           <a:p>
             <a:pPr lvl="1"/>
             <a:r>
-              <a:rPr lang="en-US" smtClean="0"/>
+              <a:rPr lang="en-US"/>
               <a:t>Second level</a:t>
             </a:r>
           </a:p>
           <a:p>
             <a:pPr lvl="2"/>
             <a:r>
-              <a:rPr lang="en-US" smtClean="0"/>
+              <a:rPr lang="en-US"/>
               <a:t>Third level</a:t>
             </a:r>
           </a:p>
           <a:p>
             <a:pPr lvl="3"/>
             <a:r>
-              <a:rPr lang="en-US" smtClean="0"/>
+              <a:rPr lang="en-US"/>
               <a:t>Fourth level</a:t>
             </a:r>
           </a:p>
           <a:p>
             <a:pPr lvl="4"/>
             <a:r>
-              <a:rPr lang="en-US" smtClean="0"/>
+              <a:rPr lang="en-US"/>
               <a:t>Fifth level</a:t>
             </a:r>
-            <a:endParaRPr lang="en-US"/>
           </a:p>
         </p:txBody>
       </p:sp>
@@ -1659,7 +1661,7 @@
           <a:p>
             <a:pPr lvl="0"/>
             <a:r>
-              <a:rPr lang="en-US" smtClean="0"/>
+              <a:rPr lang="en-US"/>
               <a:t>Click to edit Master text styles</a:t>
             </a:r>
           </a:p>
@@ -1715,38 +1717,37 @@
           <a:p>
             <a:pPr lvl="0"/>
             <a:r>
-              <a:rPr lang="en-US" smtClean="0"/>
+              <a:rPr lang="en-US"/>
               <a:t>Click to edit Master text styles</a:t>
             </a:r>
           </a:p>
           <a:p>
             <a:pPr lvl="1"/>
             <a:r>
-              <a:rPr lang="en-US" smtClean="0"/>
+              <a:rPr lang="en-US"/>
               <a:t>Second level</a:t>
             </a:r>
           </a:p>
           <a:p>
             <a:pPr lvl="2"/>
             <a:r>
-              <a:rPr lang="en-US" smtClean="0"/>
+              <a:rPr lang="en-US"/>
               <a:t>Third level</a:t>
             </a:r>
           </a:p>
           <a:p>
             <a:pPr lvl="3"/>
             <a:r>
-              <a:rPr lang="en-US" smtClean="0"/>
+              <a:rPr lang="en-US"/>
               <a:t>Fourth level</a:t>
             </a:r>
           </a:p>
           <a:p>
             <a:pPr lvl="4"/>
             <a:r>
-              <a:rPr lang="en-US" smtClean="0"/>
+              <a:rPr lang="en-US"/>
               <a:t>Fifth level</a:t>
             </a:r>
-            <a:endParaRPr lang="en-US"/>
           </a:p>
         </p:txBody>
       </p:sp>
@@ -1768,7 +1769,7 @@
             <a:fld id="{1D8BD707-D9CF-40AE-B4C6-C98DA3205C09}" type="datetimeFigureOut">
               <a:rPr lang="en-US" smtClean="0"/>
               <a:pPr/>
-              <a:t>8/1/2011</a:t>
+              <a:t>4/29/2026</a:t>
             </a:fld>
             <a:endParaRPr lang="en-US"/>
           </a:p>
@@ -1858,10 +1859,9 @@
           <a:lstStyle/>
           <a:p>
             <a:r>
-              <a:rPr lang="en-US" smtClean="0"/>
+              <a:rPr lang="en-US"/>
               <a:t>Click to edit Master title style</a:t>
             </a:r>
-            <a:endParaRPr lang="en-US"/>
           </a:p>
         </p:txBody>
       </p:sp>
@@ -1883,7 +1883,7 @@
             <a:fld id="{1D8BD707-D9CF-40AE-B4C6-C98DA3205C09}" type="datetimeFigureOut">
               <a:rPr lang="en-US" smtClean="0"/>
               <a:pPr/>
-              <a:t>8/1/2011</a:t>
+              <a:t>4/29/2026</a:t>
             </a:fld>
             <a:endParaRPr lang="en-US"/>
           </a:p>
@@ -1975,7 +1975,7 @@
             <a:fld id="{1D8BD707-D9CF-40AE-B4C6-C98DA3205C09}" type="datetimeFigureOut">
               <a:rPr lang="en-US" smtClean="0"/>
               <a:pPr/>
-              <a:t>8/1/2011</a:t>
+              <a:t>4/29/2026</a:t>
             </a:fld>
             <a:endParaRPr lang="en-US"/>
           </a:p>
@@ -2074,10 +2074,9 @@
           </a:lstStyle>
           <a:p>
             <a:r>
-              <a:rPr lang="en-US" smtClean="0"/>
+              <a:rPr lang="en-US"/>
               <a:t>Click to edit Master title style</a:t>
             </a:r>
-            <a:endParaRPr lang="en-US"/>
           </a:p>
         </p:txBody>
       </p:sp>
@@ -2131,38 +2130,37 @@
           <a:p>
             <a:pPr lvl="0"/>
             <a:r>
-              <a:rPr lang="en-US" smtClean="0"/>
+              <a:rPr lang="en-US"/>
               <a:t>Click to edit Master text styles</a:t>
             </a:r>
           </a:p>
           <a:p>
             <a:pPr lvl="1"/>
             <a:r>
-              <a:rPr lang="en-US" smtClean="0"/>
+              <a:rPr lang="en-US"/>
               <a:t>Second level</a:t>
             </a:r>
           </a:p>
           <a:p>
             <a:pPr lvl="2"/>
             <a:r>
-              <a:rPr lang="en-US" smtClean="0"/>
+              <a:rPr lang="en-US"/>
               <a:t>Third level</a:t>
             </a:r>
           </a:p>
           <a:p>
             <a:pPr lvl="3"/>
             <a:r>
-              <a:rPr lang="en-US" smtClean="0"/>
+              <a:rPr lang="en-US"/>
               <a:t>Fourth level</a:t>
             </a:r>
           </a:p>
           <a:p>
             <a:pPr lvl="4"/>
             <a:r>
-              <a:rPr lang="en-US" smtClean="0"/>
+              <a:rPr lang="en-US"/>
               <a:t>Fifth level</a:t>
             </a:r>
-            <a:endParaRPr lang="en-US"/>
           </a:p>
         </p:txBody>
       </p:sp>
@@ -2225,7 +2223,7 @@
           <a:p>
             <a:pPr lvl="0"/>
             <a:r>
-              <a:rPr lang="en-US" smtClean="0"/>
+              <a:rPr lang="en-US"/>
               <a:t>Click to edit Master text styles</a:t>
             </a:r>
           </a:p>
@@ -2249,7 +2247,7 @@
             <a:fld id="{1D8BD707-D9CF-40AE-B4C6-C98DA3205C09}" type="datetimeFigureOut">
               <a:rPr lang="en-US" smtClean="0"/>
               <a:pPr/>
-              <a:t>8/1/2011</a:t>
+              <a:t>4/29/2026</a:t>
             </a:fld>
             <a:endParaRPr lang="en-US"/>
           </a:p>
@@ -2348,10 +2346,9 @@
           </a:lstStyle>
           <a:p>
             <a:r>
-              <a:rPr lang="en-US" smtClean="0"/>
+              <a:rPr lang="en-US"/>
               <a:t>Click to edit Master title style</a:t>
             </a:r>
-            <a:endParaRPr lang="en-US"/>
           </a:p>
         </p:txBody>
       </p:sp>
@@ -2475,7 +2472,7 @@
           <a:p>
             <a:pPr lvl="0"/>
             <a:r>
-              <a:rPr lang="en-US" smtClean="0"/>
+              <a:rPr lang="en-US"/>
               <a:t>Click to edit Master text styles</a:t>
             </a:r>
           </a:p>
@@ -2499,7 +2496,7 @@
             <a:fld id="{1D8BD707-D9CF-40AE-B4C6-C98DA3205C09}" type="datetimeFigureOut">
               <a:rPr lang="en-US" smtClean="0"/>
               <a:pPr/>
-              <a:t>8/1/2011</a:t>
+              <a:t>4/29/2026</a:t>
             </a:fld>
             <a:endParaRPr lang="en-US"/>
           </a:p>
@@ -2604,10 +2601,9 @@
           <a:lstStyle/>
           <a:p>
             <a:r>
-              <a:rPr lang="en-US" smtClean="0"/>
+              <a:rPr lang="en-US"/>
               <a:t>Click to edit Master title style</a:t>
             </a:r>
-            <a:endParaRPr lang="en-US"/>
           </a:p>
         </p:txBody>
       </p:sp>
@@ -2638,38 +2634,37 @@
           <a:p>
             <a:pPr lvl="0"/>
             <a:r>
-              <a:rPr lang="en-US" smtClean="0"/>
+              <a:rPr lang="en-US"/>
               <a:t>Click to edit Master text styles</a:t>
             </a:r>
           </a:p>
           <a:p>
             <a:pPr lvl="1"/>
             <a:r>
-              <a:rPr lang="en-US" smtClean="0"/>
+              <a:rPr lang="en-US"/>
               <a:t>Second level</a:t>
             </a:r>
           </a:p>
           <a:p>
             <a:pPr lvl="2"/>
             <a:r>
-              <a:rPr lang="en-US" smtClean="0"/>
+              <a:rPr lang="en-US"/>
               <a:t>Third level</a:t>
             </a:r>
           </a:p>
           <a:p>
             <a:pPr lvl="3"/>
             <a:r>
-              <a:rPr lang="en-US" smtClean="0"/>
+              <a:rPr lang="en-US"/>
               <a:t>Fourth level</a:t>
             </a:r>
           </a:p>
           <a:p>
             <a:pPr lvl="4"/>
             <a:r>
-              <a:rPr lang="en-US" smtClean="0"/>
+              <a:rPr lang="en-US"/>
               <a:t>Fifth level</a:t>
             </a:r>
-            <a:endParaRPr lang="en-US"/>
           </a:p>
         </p:txBody>
       </p:sp>
@@ -2709,7 +2704,7 @@
             <a:fld id="{1D8BD707-D9CF-40AE-B4C6-C98DA3205C09}" type="datetimeFigureOut">
               <a:rPr lang="en-US" smtClean="0"/>
               <a:pPr/>
-              <a:t>8/1/2011</a:t>
+              <a:t>4/29/2026</a:t>
             </a:fld>
             <a:endParaRPr lang="en-US"/>
           </a:p>
@@ -3064,7 +3059,7 @@
 </file>
 
 <file path=ppt/slides/slide1.xml><?xml version="1.0" encoding="utf-8"?>
-<p:sld xmlns:p="http://schemas.openxmlformats.org/presentationml/2006/main" xmlns:a="http://schemas.openxmlformats.org/drawingml/2006/main" xmlns:r="http://schemas.openxmlformats.org/officeDocument/2006/relationships">
+<p:sld xmlns:a="http://schemas.openxmlformats.org/drawingml/2006/main" xmlns:r="http://schemas.openxmlformats.org/officeDocument/2006/relationships" xmlns:p="http://schemas.openxmlformats.org/presentationml/2006/main">
   <p:cSld>
     <p:spTree>
       <p:nvGrpSpPr>
@@ -3082,12 +3077,12 @@
       </p:grpSpPr>
       <p:sp>
         <p:nvSpPr>
-          <p:cNvPr name="Freeform 2" id="2"/>
+          <p:cNvPr id="2" name="Freeform 2"/>
           <p:cNvSpPr/>
           <p:nvPr/>
         </p:nvSpPr>
         <p:spPr>
-          <a:xfrm flipH="false" flipV="false" rot="0">
+          <a:xfrm>
             <a:off x="-804624" y="-1856884"/>
             <a:ext cx="4853594" cy="5143500"/>
           </a:xfrm>
@@ -3096,9 +3091,9 @@
             <a:gdLst/>
             <a:ahLst/>
             <a:cxnLst/>
-            <a:rect r="r" b="b" t="t" l="l"/>
+            <a:rect l="l" t="t" r="r" b="b"/>
             <a:pathLst>
-              <a:path h="5143500" w="4853594">
+              <a:path w="4853594" h="5143500">
                 <a:moveTo>
                   <a:pt x="0" y="0"/>
                 </a:moveTo>
@@ -3127,19 +3122,19 @@
               </a:extLst>
             </a:blip>
             <a:stretch>
-              <a:fillRect l="0" t="0" r="0" b="0"/>
+              <a:fillRect/>
             </a:stretch>
           </a:blipFill>
         </p:spPr>
       </p:sp>
       <p:sp>
         <p:nvSpPr>
-          <p:cNvPr name="Freeform 3" id="3"/>
+          <p:cNvPr id="3" name="Freeform 3"/>
           <p:cNvSpPr/>
           <p:nvPr/>
         </p:nvSpPr>
         <p:spPr>
-          <a:xfrm flipH="false" flipV="false" rot="0">
+          <a:xfrm>
             <a:off x="13873623" y="7715250"/>
             <a:ext cx="4853594" cy="5143500"/>
           </a:xfrm>
@@ -3148,9 +3143,9 @@
             <a:gdLst/>
             <a:ahLst/>
             <a:cxnLst/>
-            <a:rect r="r" b="b" t="t" l="l"/>
+            <a:rect l="l" t="t" r="r" b="b"/>
             <a:pathLst>
-              <a:path h="5143500" w="4853594">
+              <a:path w="4853594" h="5143500">
                 <a:moveTo>
                   <a:pt x="0" y="0"/>
                 </a:moveTo>
@@ -3179,19 +3174,19 @@
               </a:extLst>
             </a:blip>
             <a:stretch>
-              <a:fillRect l="0" t="0" r="0" b="0"/>
+              <a:fillRect/>
             </a:stretch>
           </a:blipFill>
         </p:spPr>
       </p:sp>
       <p:sp>
         <p:nvSpPr>
-          <p:cNvPr name="TextBox 4" id="4"/>
-          <p:cNvSpPr txBox="true"/>
+          <p:cNvPr id="4" name="TextBox 4"/>
+          <p:cNvSpPr txBox="1"/>
           <p:nvPr/>
         </p:nvSpPr>
         <p:spPr>
-          <a:xfrm rot="0">
+          <a:xfrm>
             <a:off x="1851637" y="2275417"/>
             <a:ext cx="14584725" cy="1964055"/>
           </a:xfrm>
@@ -3200,7 +3195,7 @@
           </a:prstGeom>
         </p:spPr>
         <p:txBody>
-          <a:bodyPr anchor="t" rtlCol="false" tIns="0" lIns="0" bIns="0" rIns="0">
+          <a:bodyPr lIns="0" tIns="0" rIns="0" bIns="0" rtlCol="0" anchor="t">
             <a:spAutoFit/>
           </a:bodyPr>
           <a:lstStyle/>
@@ -3211,7 +3206,7 @@
               </a:lnSpc>
             </a:pPr>
             <a:r>
-              <a:rPr lang="en-US" b="true" sz="8000">
+              <a:rPr lang="en-US" sz="8000" b="1" dirty="0">
                 <a:solidFill>
                   <a:srgbClr val="21625D"/>
                 </a:solidFill>
@@ -3230,7 +3225,7 @@
               </a:lnSpc>
             </a:pPr>
             <a:r>
-              <a:rPr lang="en-US" b="true" sz="5000">
+              <a:rPr lang="en-US" sz="5000" b="1" dirty="0">
                 <a:solidFill>
                   <a:srgbClr val="21625D"/>
                 </a:solidFill>
@@ -3239,31 +3234,19 @@
                 <a:cs typeface="Poppins Bold"/>
                 <a:sym typeface="Poppins Bold"/>
               </a:rPr>
-              <a:t>DESA</a:t>
-            </a:r>
-            <a:r>
-              <a:rPr lang="en-US" b="true" sz="5000">
-                <a:solidFill>
-                  <a:srgbClr val="21625D"/>
-                </a:solidFill>
-                <a:latin typeface="Poppins Bold"/>
-                <a:ea typeface="Poppins Bold"/>
-                <a:cs typeface="Poppins Bold"/>
-                <a:sym typeface="Poppins Bold"/>
-              </a:rPr>
-              <a:t>IN MEDIA PEMBELAJARAN</a:t>
-            </a:r>
-          </a:p>
-        </p:txBody>
-      </p:sp>
-      <p:sp>
-        <p:nvSpPr>
-          <p:cNvPr name="Freeform 5" id="5"/>
+              <a:t>JENIS MEDIA PEMBELAJARAN</a:t>
+            </a:r>
+          </a:p>
+        </p:txBody>
+      </p:sp>
+      <p:sp>
+        <p:nvSpPr>
+          <p:cNvPr id="5" name="Freeform 5"/>
           <p:cNvSpPr/>
           <p:nvPr/>
         </p:nvSpPr>
         <p:spPr>
-          <a:xfrm flipH="false" flipV="false" rot="0">
+          <a:xfrm>
             <a:off x="-2481731" y="5143500"/>
             <a:ext cx="4963461" cy="6348614"/>
           </a:xfrm>
@@ -3272,9 +3255,9 @@
             <a:gdLst/>
             <a:ahLst/>
             <a:cxnLst/>
-            <a:rect r="r" b="b" t="t" l="l"/>
+            <a:rect l="l" t="t" r="r" b="b"/>
             <a:pathLst>
-              <a:path h="6348614" w="4963461">
+              <a:path w="4963461" h="6348614">
                 <a:moveTo>
                   <a:pt x="0" y="0"/>
                 </a:moveTo>
@@ -3303,19 +3286,19 @@
               </a:extLst>
             </a:blip>
             <a:stretch>
-              <a:fillRect l="0" t="0" r="0" b="0"/>
+              <a:fillRect/>
             </a:stretch>
           </a:blipFill>
         </p:spPr>
       </p:sp>
       <p:sp>
         <p:nvSpPr>
-          <p:cNvPr name="Freeform 6" id="6"/>
+          <p:cNvPr id="6" name="Freeform 6"/>
           <p:cNvSpPr/>
           <p:nvPr/>
         </p:nvSpPr>
         <p:spPr>
-          <a:xfrm flipH="false" flipV="false" rot="0">
+          <a:xfrm>
             <a:off x="15148790" y="-1205114"/>
             <a:ext cx="4963461" cy="6348614"/>
           </a:xfrm>
@@ -3324,9 +3307,9 @@
             <a:gdLst/>
             <a:ahLst/>
             <a:cxnLst/>
-            <a:rect r="r" b="b" t="t" l="l"/>
+            <a:rect l="l" t="t" r="r" b="b"/>
             <a:pathLst>
-              <a:path h="6348614" w="4963461">
+              <a:path w="4963461" h="6348614">
                 <a:moveTo>
                   <a:pt x="0" y="0"/>
                 </a:moveTo>
@@ -3355,19 +3338,19 @@
               </a:extLst>
             </a:blip>
             <a:stretch>
-              <a:fillRect l="0" t="0" r="0" b="0"/>
+              <a:fillRect/>
             </a:stretch>
           </a:blipFill>
         </p:spPr>
       </p:sp>
       <p:sp>
         <p:nvSpPr>
-          <p:cNvPr name="TextBox 7" id="7"/>
-          <p:cNvSpPr txBox="true"/>
+          <p:cNvPr id="7" name="TextBox 7"/>
+          <p:cNvSpPr txBox="1"/>
           <p:nvPr/>
         </p:nvSpPr>
         <p:spPr>
-          <a:xfrm rot="0">
+          <a:xfrm>
             <a:off x="2092820" y="4367549"/>
             <a:ext cx="14102361" cy="628824"/>
           </a:xfrm>
@@ -3376,7 +3359,7 @@
           </a:prstGeom>
         </p:spPr>
         <p:txBody>
-          <a:bodyPr anchor="t" rtlCol="false" tIns="0" lIns="0" bIns="0" rIns="0">
+          <a:bodyPr lIns="0" tIns="0" rIns="0" bIns="0" rtlCol="0" anchor="t">
             <a:spAutoFit/>
           </a:bodyPr>
           <a:lstStyle/>
@@ -3387,7 +3370,7 @@
               </a:lnSpc>
             </a:pPr>
             <a:r>
-              <a:rPr lang="en-US" sz="4038">
+              <a:rPr lang="en-US" sz="4038" dirty="0">
                 <a:solidFill>
                   <a:srgbClr val="21625D"/>
                 </a:solidFill>
@@ -3396,19 +3379,40 @@
                 <a:cs typeface="Poppins"/>
                 <a:sym typeface="Poppins"/>
               </a:rPr>
-              <a:t>Pendidikan Ekonomi - STKIP Majenang</a:t>
-            </a:r>
-          </a:p>
-        </p:txBody>
-      </p:sp>
-      <p:sp>
-        <p:nvSpPr>
-          <p:cNvPr name="TextBox 8" id="8"/>
-          <p:cNvSpPr txBox="true"/>
+              <a:t>Pendidikan Ekonomi - STKIP </a:t>
+            </a:r>
+            <a:r>
+              <a:rPr lang="en-US" sz="4038" dirty="0" err="1">
+                <a:solidFill>
+                  <a:srgbClr val="21625D"/>
+                </a:solidFill>
+                <a:latin typeface="Poppins"/>
+                <a:ea typeface="Poppins"/>
+                <a:cs typeface="Poppins"/>
+                <a:sym typeface="Poppins"/>
+              </a:rPr>
+              <a:t>Majenang</a:t>
+            </a:r>
+            <a:endParaRPr lang="en-US" sz="4038" dirty="0">
+              <a:solidFill>
+                <a:srgbClr val="21625D"/>
+              </a:solidFill>
+              <a:latin typeface="Poppins"/>
+              <a:ea typeface="Poppins"/>
+              <a:cs typeface="Poppins"/>
+              <a:sym typeface="Poppins"/>
+            </a:endParaRPr>
+          </a:p>
+        </p:txBody>
+      </p:sp>
+      <p:sp>
+        <p:nvSpPr>
+          <p:cNvPr id="8" name="TextBox 8"/>
+          <p:cNvSpPr txBox="1"/>
           <p:nvPr/>
         </p:nvSpPr>
         <p:spPr>
-          <a:xfrm rot="0">
+          <a:xfrm>
             <a:off x="2366245" y="5653424"/>
             <a:ext cx="14102361" cy="1207821"/>
           </a:xfrm>
@@ -3417,7 +3421,7 @@
           </a:prstGeom>
         </p:spPr>
         <p:txBody>
-          <a:bodyPr anchor="t" rtlCol="false" tIns="0" lIns="0" bIns="0" rIns="0">
+          <a:bodyPr lIns="0" tIns="0" rIns="0" bIns="0" rtlCol="0" anchor="t">
             <a:spAutoFit/>
           </a:bodyPr>
           <a:lstStyle/>
@@ -3470,7 +3474,7 @@
 </file>
 
 <file path=ppt/slides/slide10.xml><?xml version="1.0" encoding="utf-8"?>
-<p:sld xmlns:p="http://schemas.openxmlformats.org/presentationml/2006/main" xmlns:a="http://schemas.openxmlformats.org/drawingml/2006/main" xmlns:r="http://schemas.openxmlformats.org/officeDocument/2006/relationships">
+<p:sld xmlns:a="http://schemas.openxmlformats.org/drawingml/2006/main" xmlns:r="http://schemas.openxmlformats.org/officeDocument/2006/relationships" xmlns:p="http://schemas.openxmlformats.org/presentationml/2006/main">
   <p:cSld>
     <p:spTree>
       <p:nvGrpSpPr>
@@ -3488,12 +3492,12 @@
       </p:grpSpPr>
       <p:sp>
         <p:nvSpPr>
-          <p:cNvPr name="Freeform 2" id="2"/>
+          <p:cNvPr id="2" name="Freeform 2"/>
           <p:cNvSpPr/>
           <p:nvPr/>
         </p:nvSpPr>
         <p:spPr>
-          <a:xfrm flipH="false" flipV="false" rot="0">
+          <a:xfrm>
             <a:off x="-804624" y="-1856884"/>
             <a:ext cx="4471271" cy="4738341"/>
           </a:xfrm>
@@ -3502,9 +3506,9 @@
             <a:gdLst/>
             <a:ahLst/>
             <a:cxnLst/>
-            <a:rect r="r" b="b" t="t" l="l"/>
+            <a:rect l="l" t="t" r="r" b="b"/>
             <a:pathLst>
-              <a:path h="4738341" w="4471271">
+              <a:path w="4471271" h="4738341">
                 <a:moveTo>
                   <a:pt x="0" y="0"/>
                 </a:moveTo>
@@ -3533,19 +3537,19 @@
               </a:extLst>
             </a:blip>
             <a:stretch>
-              <a:fillRect l="0" t="0" r="0" b="0"/>
+              <a:fillRect/>
             </a:stretch>
           </a:blipFill>
         </p:spPr>
       </p:sp>
       <p:sp>
         <p:nvSpPr>
-          <p:cNvPr name="Freeform 3" id="3"/>
+          <p:cNvPr id="3" name="Freeform 3"/>
           <p:cNvSpPr/>
           <p:nvPr/>
         </p:nvSpPr>
         <p:spPr>
-          <a:xfrm flipH="false" flipV="false" rot="0">
+          <a:xfrm>
             <a:off x="14306075" y="8267015"/>
             <a:ext cx="4332928" cy="4591735"/>
           </a:xfrm>
@@ -3554,9 +3558,9 @@
             <a:gdLst/>
             <a:ahLst/>
             <a:cxnLst/>
-            <a:rect r="r" b="b" t="t" l="l"/>
+            <a:rect l="l" t="t" r="r" b="b"/>
             <a:pathLst>
-              <a:path h="4591735" w="4332928">
+              <a:path w="4332928" h="4591735">
                 <a:moveTo>
                   <a:pt x="0" y="0"/>
                 </a:moveTo>
@@ -3585,19 +3589,19 @@
               </a:extLst>
             </a:blip>
             <a:stretch>
-              <a:fillRect l="0" t="0" r="0" b="0"/>
+              <a:fillRect/>
             </a:stretch>
           </a:blipFill>
         </p:spPr>
       </p:sp>
       <p:sp>
         <p:nvSpPr>
-          <p:cNvPr name="TextBox 4" id="4"/>
-          <p:cNvSpPr txBox="true"/>
+          <p:cNvPr id="4" name="TextBox 4"/>
+          <p:cNvSpPr txBox="1"/>
           <p:nvPr/>
         </p:nvSpPr>
         <p:spPr>
-          <a:xfrm rot="0">
+          <a:xfrm>
             <a:off x="4801760" y="1009650"/>
             <a:ext cx="8684479" cy="1021842"/>
           </a:xfrm>
@@ -3606,7 +3610,7 @@
           </a:prstGeom>
         </p:spPr>
         <p:txBody>
-          <a:bodyPr anchor="t" rtlCol="false" tIns="0" lIns="0" bIns="0" rIns="0">
+          <a:bodyPr lIns="0" tIns="0" rIns="0" bIns="0" rtlCol="0" anchor="t">
             <a:spAutoFit/>
           </a:bodyPr>
           <a:lstStyle/>
@@ -3617,7 +3621,7 @@
               </a:lnSpc>
             </a:pPr>
             <a:r>
-              <a:rPr lang="en-US" b="true" sz="6600">
+              <a:rPr lang="en-US" sz="6600" b="1">
                 <a:solidFill>
                   <a:srgbClr val="21625D"/>
                 </a:solidFill>
@@ -3633,12 +3637,12 @@
       </p:sp>
       <p:sp>
         <p:nvSpPr>
-          <p:cNvPr name="Freeform 5" id="5"/>
+          <p:cNvPr id="5" name="Freeform 5"/>
           <p:cNvSpPr/>
           <p:nvPr/>
         </p:nvSpPr>
         <p:spPr>
-          <a:xfrm flipH="false" flipV="false" rot="0">
+          <a:xfrm>
             <a:off x="-2481731" y="5907492"/>
             <a:ext cx="4366159" cy="5584622"/>
           </a:xfrm>
@@ -3647,9 +3651,9 @@
             <a:gdLst/>
             <a:ahLst/>
             <a:cxnLst/>
-            <a:rect r="r" b="b" t="t" l="l"/>
+            <a:rect l="l" t="t" r="r" b="b"/>
             <a:pathLst>
-              <a:path h="5584622" w="4366159">
+              <a:path w="4366159" h="5584622">
                 <a:moveTo>
                   <a:pt x="0" y="0"/>
                 </a:moveTo>
@@ -3678,19 +3682,19 @@
               </a:extLst>
             </a:blip>
             <a:stretch>
-              <a:fillRect l="0" t="0" r="0" b="0"/>
+              <a:fillRect/>
             </a:stretch>
           </a:blipFill>
         </p:spPr>
       </p:sp>
       <p:sp>
         <p:nvSpPr>
-          <p:cNvPr name="Freeform 6" id="6"/>
+          <p:cNvPr id="6" name="Freeform 6"/>
           <p:cNvSpPr/>
           <p:nvPr/>
         </p:nvSpPr>
         <p:spPr>
-          <a:xfrm flipH="false" flipV="false" rot="0">
+          <a:xfrm>
             <a:off x="15693892" y="-1205114"/>
             <a:ext cx="4418360" cy="5651391"/>
           </a:xfrm>
@@ -3699,9 +3703,9 @@
             <a:gdLst/>
             <a:ahLst/>
             <a:cxnLst/>
-            <a:rect r="r" b="b" t="t" l="l"/>
+            <a:rect l="l" t="t" r="r" b="b"/>
             <a:pathLst>
-              <a:path h="5651391" w="4418360">
+              <a:path w="4418360" h="5651391">
                 <a:moveTo>
                   <a:pt x="0" y="0"/>
                 </a:moveTo>
@@ -3730,19 +3734,19 @@
               </a:extLst>
             </a:blip>
             <a:stretch>
-              <a:fillRect l="0" t="0" r="0" b="0"/>
+              <a:fillRect/>
             </a:stretch>
           </a:blipFill>
         </p:spPr>
       </p:sp>
       <p:sp>
         <p:nvSpPr>
-          <p:cNvPr name="TextBox 7" id="7"/>
-          <p:cNvSpPr txBox="true"/>
+          <p:cNvPr id="7" name="TextBox 7"/>
+          <p:cNvSpPr txBox="1"/>
           <p:nvPr/>
         </p:nvSpPr>
         <p:spPr>
-          <a:xfrm rot="0">
+          <a:xfrm>
             <a:off x="2658509" y="2760777"/>
             <a:ext cx="13814030" cy="5588580"/>
           </a:xfrm>
@@ -3751,7 +3755,7 @@
           </a:prstGeom>
         </p:spPr>
         <p:txBody>
-          <a:bodyPr anchor="t" rtlCol="false" tIns="0" lIns="0" bIns="0" rIns="0">
+          <a:bodyPr lIns="0" tIns="0" rIns="0" bIns="0" rtlCol="0" anchor="t">
             <a:spAutoFit/>
           </a:bodyPr>
           <a:lstStyle/>
@@ -3780,6 +3784,15 @@
                 <a:spcPts val="4908"/>
               </a:lnSpc>
             </a:pPr>
+            <a:endParaRPr lang="en-US" sz="3636">
+              <a:solidFill>
+                <a:srgbClr val="21625D"/>
+              </a:solidFill>
+              <a:latin typeface="Poppins"/>
+              <a:ea typeface="Poppins"/>
+              <a:cs typeface="Poppins"/>
+              <a:sym typeface="Poppins"/>
+            </a:endParaRPr>
           </a:p>
           <a:p>
             <a:pPr algn="just">
@@ -3797,8 +3810,31 @@
                 <a:cs typeface="Poppins"/>
                 <a:sym typeface="Poppins"/>
               </a:rPr>
-              <a:t>C</a:t>
-            </a:r>
+              <a:t>Contoh:</a:t>
+            </a:r>
+          </a:p>
+          <a:p>
+            <a:pPr algn="just">
+              <a:lnSpc>
+                <a:spcPts val="4908"/>
+              </a:lnSpc>
+            </a:pPr>
+            <a:endParaRPr lang="en-US" sz="3636">
+              <a:solidFill>
+                <a:srgbClr val="21625D"/>
+              </a:solidFill>
+              <a:latin typeface="Poppins"/>
+              <a:ea typeface="Poppins"/>
+              <a:cs typeface="Poppins"/>
+              <a:sym typeface="Poppins"/>
+            </a:endParaRPr>
+          </a:p>
+          <a:p>
+            <a:pPr algn="just">
+              <a:lnSpc>
+                <a:spcPts val="4908"/>
+              </a:lnSpc>
+            </a:pPr>
             <a:r>
               <a:rPr lang="en-US" sz="3636">
                 <a:solidFill>
@@ -3809,21 +3845,16 @@
                 <a:cs typeface="Poppins"/>
                 <a:sym typeface="Poppins"/>
               </a:rPr>
-              <a:t>ontoh:</a:t>
-            </a:r>
-          </a:p>
-          <a:p>
-            <a:pPr algn="just">
+              <a:t>Materi: Inflasi</a:t>
+            </a:r>
+          </a:p>
+          <a:p>
+            <a:pPr marL="785058" lvl="1" indent="-392529" algn="just">
               <a:lnSpc>
                 <a:spcPts val="4908"/>
               </a:lnSpc>
-            </a:pPr>
-          </a:p>
-          <a:p>
-            <a:pPr algn="just">
-              <a:lnSpc>
-                <a:spcPts val="4908"/>
-              </a:lnSpc>
+              <a:buFont typeface="Arial"/>
+              <a:buChar char="•"/>
             </a:pPr>
             <a:r>
               <a:rPr lang="en-US" sz="3636">
@@ -3835,8 +3866,17 @@
                 <a:cs typeface="Poppins"/>
                 <a:sym typeface="Poppins"/>
               </a:rPr>
-              <a:t>M</a:t>
-            </a:r>
+              <a:t>Grafik → memahami data</a:t>
+            </a:r>
+          </a:p>
+          <a:p>
+            <a:pPr marL="785058" lvl="1" indent="-392529" algn="just">
+              <a:lnSpc>
+                <a:spcPts val="4908"/>
+              </a:lnSpc>
+              <a:buFont typeface="Arial"/>
+              <a:buChar char="•"/>
+            </a:pPr>
             <a:r>
               <a:rPr lang="en-US" sz="3636">
                 <a:solidFill>
@@ -3847,77 +3887,11 @@
                 <a:cs typeface="Poppins"/>
                 <a:sym typeface="Poppins"/>
               </a:rPr>
-              <a:t>ateri: Inflasi</a:t>
-            </a:r>
-          </a:p>
-          <a:p>
-            <a:pPr algn="just" marL="785058" indent="-392529" lvl="1">
-              <a:lnSpc>
-                <a:spcPts val="4908"/>
-              </a:lnSpc>
-              <a:buFont typeface="Arial"/>
-              <a:buChar char="•"/>
-            </a:pPr>
-            <a:r>
-              <a:rPr lang="en-US" sz="3636">
-                <a:solidFill>
-                  <a:srgbClr val="21625D"/>
-                </a:solidFill>
-                <a:latin typeface="Poppins"/>
-                <a:ea typeface="Poppins"/>
-                <a:cs typeface="Poppins"/>
-                <a:sym typeface="Poppins"/>
-              </a:rPr>
-              <a:t>Gr</a:t>
-            </a:r>
-            <a:r>
-              <a:rPr lang="en-US" sz="3636">
-                <a:solidFill>
-                  <a:srgbClr val="21625D"/>
-                </a:solidFill>
-                <a:latin typeface="Poppins"/>
-                <a:ea typeface="Poppins"/>
-                <a:cs typeface="Poppins"/>
-                <a:sym typeface="Poppins"/>
-              </a:rPr>
-              <a:t>afik → memahami data</a:t>
-            </a:r>
-          </a:p>
-          <a:p>
-            <a:pPr algn="just" marL="785058" indent="-392529" lvl="1">
-              <a:lnSpc>
-                <a:spcPts val="4908"/>
-              </a:lnSpc>
-              <a:buFont typeface="Arial"/>
-              <a:buChar char="•"/>
-            </a:pPr>
-            <a:r>
-              <a:rPr lang="en-US" sz="3636">
-                <a:solidFill>
-                  <a:srgbClr val="21625D"/>
-                </a:solidFill>
-                <a:latin typeface="Poppins"/>
-                <a:ea typeface="Poppins"/>
-                <a:cs typeface="Poppins"/>
-                <a:sym typeface="Poppins"/>
-              </a:rPr>
-              <a:t>Vi</a:t>
-            </a:r>
-            <a:r>
-              <a:rPr lang="en-US" sz="3636">
-                <a:solidFill>
-                  <a:srgbClr val="21625D"/>
-                </a:solidFill>
-                <a:latin typeface="Poppins"/>
-                <a:ea typeface="Poppins"/>
-                <a:cs typeface="Poppins"/>
-                <a:sym typeface="Poppins"/>
-              </a:rPr>
-              <a:t>deo → memahami konsep</a:t>
-            </a:r>
-          </a:p>
-          <a:p>
-            <a:pPr algn="just" marL="785058" indent="-392529" lvl="1">
+              <a:t>Video → memahami konsep</a:t>
+            </a:r>
+          </a:p>
+          <a:p>
+            <a:pPr marL="785058" lvl="1" indent="-392529" algn="just">
               <a:lnSpc>
                 <a:spcPts val="4908"/>
               </a:lnSpc>
@@ -3943,6 +3917,15 @@
                 <a:spcPts val="4908"/>
               </a:lnSpc>
             </a:pPr>
+            <a:endParaRPr lang="en-US" sz="3636">
+              <a:solidFill>
+                <a:srgbClr val="21625D"/>
+              </a:solidFill>
+              <a:latin typeface="Poppins"/>
+              <a:ea typeface="Poppins"/>
+              <a:cs typeface="Poppins"/>
+              <a:sym typeface="Poppins"/>
+            </a:endParaRPr>
           </a:p>
         </p:txBody>
       </p:sp>
@@ -3955,7 +3938,7 @@
 </file>
 
 <file path=ppt/slides/slide11.xml><?xml version="1.0" encoding="utf-8"?>
-<p:sld xmlns:p="http://schemas.openxmlformats.org/presentationml/2006/main" xmlns:a="http://schemas.openxmlformats.org/drawingml/2006/main" xmlns:r="http://schemas.openxmlformats.org/officeDocument/2006/relationships">
+<p:sld xmlns:a="http://schemas.openxmlformats.org/drawingml/2006/main" xmlns:r="http://schemas.openxmlformats.org/officeDocument/2006/relationships" xmlns:p="http://schemas.openxmlformats.org/presentationml/2006/main">
   <p:cSld>
     <p:spTree>
       <p:nvGrpSpPr>
@@ -3973,12 +3956,12 @@
       </p:grpSpPr>
       <p:sp>
         <p:nvSpPr>
-          <p:cNvPr name="Freeform 2" id="2"/>
+          <p:cNvPr id="2" name="Freeform 2"/>
           <p:cNvSpPr/>
           <p:nvPr/>
         </p:nvSpPr>
         <p:spPr>
-          <a:xfrm flipH="false" flipV="false" rot="0">
+          <a:xfrm>
             <a:off x="-804624" y="-1856884"/>
             <a:ext cx="4471271" cy="4738341"/>
           </a:xfrm>
@@ -3987,9 +3970,9 @@
             <a:gdLst/>
             <a:ahLst/>
             <a:cxnLst/>
-            <a:rect r="r" b="b" t="t" l="l"/>
+            <a:rect l="l" t="t" r="r" b="b"/>
             <a:pathLst>
-              <a:path h="4738341" w="4471271">
+              <a:path w="4471271" h="4738341">
                 <a:moveTo>
                   <a:pt x="0" y="0"/>
                 </a:moveTo>
@@ -4018,19 +4001,19 @@
               </a:extLst>
             </a:blip>
             <a:stretch>
-              <a:fillRect l="0" t="0" r="0" b="0"/>
+              <a:fillRect/>
             </a:stretch>
           </a:blipFill>
         </p:spPr>
       </p:sp>
       <p:sp>
         <p:nvSpPr>
-          <p:cNvPr name="Freeform 3" id="3"/>
+          <p:cNvPr id="3" name="Freeform 3"/>
           <p:cNvSpPr/>
           <p:nvPr/>
         </p:nvSpPr>
         <p:spPr>
-          <a:xfrm flipH="false" flipV="false" rot="0">
+          <a:xfrm>
             <a:off x="14306075" y="8267015"/>
             <a:ext cx="4332928" cy="4591735"/>
           </a:xfrm>
@@ -4039,9 +4022,9 @@
             <a:gdLst/>
             <a:ahLst/>
             <a:cxnLst/>
-            <a:rect r="r" b="b" t="t" l="l"/>
+            <a:rect l="l" t="t" r="r" b="b"/>
             <a:pathLst>
-              <a:path h="4591735" w="4332928">
+              <a:path w="4332928" h="4591735">
                 <a:moveTo>
                   <a:pt x="0" y="0"/>
                 </a:moveTo>
@@ -4070,19 +4053,19 @@
               </a:extLst>
             </a:blip>
             <a:stretch>
-              <a:fillRect l="0" t="0" r="0" b="0"/>
+              <a:fillRect/>
             </a:stretch>
           </a:blipFill>
         </p:spPr>
       </p:sp>
       <p:sp>
         <p:nvSpPr>
-          <p:cNvPr name="TextBox 4" id="4"/>
-          <p:cNvSpPr txBox="true"/>
+          <p:cNvPr id="4" name="TextBox 4"/>
+          <p:cNvSpPr txBox="1"/>
           <p:nvPr/>
         </p:nvSpPr>
         <p:spPr>
-          <a:xfrm rot="0">
+          <a:xfrm>
             <a:off x="5452269" y="1859615"/>
             <a:ext cx="7383461" cy="1021842"/>
           </a:xfrm>
@@ -4091,7 +4074,7 @@
           </a:prstGeom>
         </p:spPr>
         <p:txBody>
-          <a:bodyPr anchor="t" rtlCol="false" tIns="0" lIns="0" bIns="0" rIns="0">
+          <a:bodyPr lIns="0" tIns="0" rIns="0" bIns="0" rtlCol="0" anchor="t">
             <a:spAutoFit/>
           </a:bodyPr>
           <a:lstStyle/>
@@ -4102,7 +4085,7 @@
               </a:lnSpc>
             </a:pPr>
             <a:r>
-              <a:rPr lang="en-US" b="true" sz="6600">
+              <a:rPr lang="en-US" sz="6600" b="1">
                 <a:solidFill>
                   <a:srgbClr val="21625D"/>
                 </a:solidFill>
@@ -4118,12 +4101,12 @@
       </p:sp>
       <p:sp>
         <p:nvSpPr>
-          <p:cNvPr name="Freeform 5" id="5"/>
+          <p:cNvPr id="5" name="Freeform 5"/>
           <p:cNvSpPr/>
           <p:nvPr/>
         </p:nvSpPr>
         <p:spPr>
-          <a:xfrm flipH="false" flipV="false" rot="0">
+          <a:xfrm>
             <a:off x="-2481731" y="5907492"/>
             <a:ext cx="4366159" cy="5584622"/>
           </a:xfrm>
@@ -4132,9 +4115,9 @@
             <a:gdLst/>
             <a:ahLst/>
             <a:cxnLst/>
-            <a:rect r="r" b="b" t="t" l="l"/>
+            <a:rect l="l" t="t" r="r" b="b"/>
             <a:pathLst>
-              <a:path h="5584622" w="4366159">
+              <a:path w="4366159" h="5584622">
                 <a:moveTo>
                   <a:pt x="0" y="0"/>
                 </a:moveTo>
@@ -4163,19 +4146,19 @@
               </a:extLst>
             </a:blip>
             <a:stretch>
-              <a:fillRect l="0" t="0" r="0" b="0"/>
+              <a:fillRect/>
             </a:stretch>
           </a:blipFill>
         </p:spPr>
       </p:sp>
       <p:sp>
         <p:nvSpPr>
-          <p:cNvPr name="Freeform 6" id="6"/>
+          <p:cNvPr id="6" name="Freeform 6"/>
           <p:cNvSpPr/>
           <p:nvPr/>
         </p:nvSpPr>
         <p:spPr>
-          <a:xfrm flipH="false" flipV="false" rot="0">
+          <a:xfrm>
             <a:off x="15693892" y="-1205114"/>
             <a:ext cx="4418360" cy="5651391"/>
           </a:xfrm>
@@ -4184,9 +4167,9 @@
             <a:gdLst/>
             <a:ahLst/>
             <a:cxnLst/>
-            <a:rect r="r" b="b" t="t" l="l"/>
+            <a:rect l="l" t="t" r="r" b="b"/>
             <a:pathLst>
-              <a:path h="5651391" w="4418360">
+              <a:path w="4418360" h="5651391">
                 <a:moveTo>
                   <a:pt x="0" y="0"/>
                 </a:moveTo>
@@ -4215,19 +4198,19 @@
               </a:extLst>
             </a:blip>
             <a:stretch>
-              <a:fillRect l="0" t="0" r="0" b="0"/>
+              <a:fillRect/>
             </a:stretch>
           </a:blipFill>
         </p:spPr>
       </p:sp>
       <p:sp>
         <p:nvSpPr>
-          <p:cNvPr name="TextBox 7" id="7"/>
-          <p:cNvSpPr txBox="true"/>
+          <p:cNvPr id="7" name="TextBox 7"/>
+          <p:cNvSpPr txBox="1"/>
           <p:nvPr/>
         </p:nvSpPr>
         <p:spPr>
-          <a:xfrm rot="0">
+          <a:xfrm>
             <a:off x="2658509" y="3541082"/>
             <a:ext cx="13035383" cy="3704358"/>
           </a:xfrm>
@@ -4236,7 +4219,7 @@
           </a:prstGeom>
         </p:spPr>
         <p:txBody>
-          <a:bodyPr anchor="t" rtlCol="false" tIns="0" lIns="0" bIns="0" rIns="0">
+          <a:bodyPr lIns="0" tIns="0" rIns="0" bIns="0" rtlCol="0" anchor="t">
             <a:spAutoFit/>
           </a:bodyPr>
           <a:lstStyle/>
@@ -4303,6 +4286,15 @@
                 <a:spcPts val="4145"/>
               </a:lnSpc>
             </a:pPr>
+            <a:endParaRPr lang="en-US" sz="3636">
+              <a:solidFill>
+                <a:srgbClr val="21625D"/>
+              </a:solidFill>
+              <a:latin typeface="Poppins"/>
+              <a:ea typeface="Poppins"/>
+              <a:cs typeface="Poppins"/>
+              <a:sym typeface="Poppins"/>
+            </a:endParaRPr>
           </a:p>
         </p:txBody>
       </p:sp>
@@ -4315,7 +4307,7 @@
 </file>
 
 <file path=ppt/slides/slide12.xml><?xml version="1.0" encoding="utf-8"?>
-<p:sld xmlns:p="http://schemas.openxmlformats.org/presentationml/2006/main" xmlns:a="http://schemas.openxmlformats.org/drawingml/2006/main" xmlns:r="http://schemas.openxmlformats.org/officeDocument/2006/relationships">
+<p:sld xmlns:a="http://schemas.openxmlformats.org/drawingml/2006/main" xmlns:r="http://schemas.openxmlformats.org/officeDocument/2006/relationships" xmlns:p="http://schemas.openxmlformats.org/presentationml/2006/main">
   <p:cSld>
     <p:spTree>
       <p:nvGrpSpPr>
@@ -4333,12 +4325,12 @@
       </p:grpSpPr>
       <p:sp>
         <p:nvSpPr>
-          <p:cNvPr name="Freeform 2" id="2"/>
+          <p:cNvPr id="2" name="Freeform 2"/>
           <p:cNvSpPr/>
           <p:nvPr/>
         </p:nvSpPr>
         <p:spPr>
-          <a:xfrm flipH="false" flipV="false" rot="0">
+          <a:xfrm>
             <a:off x="-804624" y="-1856884"/>
             <a:ext cx="4471271" cy="4738341"/>
           </a:xfrm>
@@ -4347,9 +4339,9 @@
             <a:gdLst/>
             <a:ahLst/>
             <a:cxnLst/>
-            <a:rect r="r" b="b" t="t" l="l"/>
+            <a:rect l="l" t="t" r="r" b="b"/>
             <a:pathLst>
-              <a:path h="4738341" w="4471271">
+              <a:path w="4471271" h="4738341">
                 <a:moveTo>
                   <a:pt x="0" y="0"/>
                 </a:moveTo>
@@ -4378,19 +4370,19 @@
               </a:extLst>
             </a:blip>
             <a:stretch>
-              <a:fillRect l="0" t="0" r="0" b="0"/>
+              <a:fillRect/>
             </a:stretch>
           </a:blipFill>
         </p:spPr>
       </p:sp>
       <p:sp>
         <p:nvSpPr>
-          <p:cNvPr name="Freeform 3" id="3"/>
+          <p:cNvPr id="3" name="Freeform 3"/>
           <p:cNvSpPr/>
           <p:nvPr/>
         </p:nvSpPr>
         <p:spPr>
-          <a:xfrm flipH="false" flipV="false" rot="0">
+          <a:xfrm>
             <a:off x="14306075" y="8267015"/>
             <a:ext cx="4332928" cy="4591735"/>
           </a:xfrm>
@@ -4399,9 +4391,9 @@
             <a:gdLst/>
             <a:ahLst/>
             <a:cxnLst/>
-            <a:rect r="r" b="b" t="t" l="l"/>
+            <a:rect l="l" t="t" r="r" b="b"/>
             <a:pathLst>
-              <a:path h="4591735" w="4332928">
+              <a:path w="4332928" h="4591735">
                 <a:moveTo>
                   <a:pt x="0" y="0"/>
                 </a:moveTo>
@@ -4430,19 +4422,19 @@
               </a:extLst>
             </a:blip>
             <a:stretch>
-              <a:fillRect l="0" t="0" r="0" b="0"/>
+              <a:fillRect/>
             </a:stretch>
           </a:blipFill>
         </p:spPr>
       </p:sp>
       <p:sp>
         <p:nvSpPr>
-          <p:cNvPr name="TextBox 4" id="4"/>
-          <p:cNvSpPr txBox="true"/>
+          <p:cNvPr id="4" name="TextBox 4"/>
+          <p:cNvSpPr txBox="1"/>
           <p:nvPr/>
         </p:nvSpPr>
         <p:spPr>
-          <a:xfrm rot="0">
+          <a:xfrm>
             <a:off x="5043810" y="1859615"/>
             <a:ext cx="8200379" cy="1021842"/>
           </a:xfrm>
@@ -4451,7 +4443,7 @@
           </a:prstGeom>
         </p:spPr>
         <p:txBody>
-          <a:bodyPr anchor="t" rtlCol="false" tIns="0" lIns="0" bIns="0" rIns="0">
+          <a:bodyPr lIns="0" tIns="0" rIns="0" bIns="0" rtlCol="0" anchor="t">
             <a:spAutoFit/>
           </a:bodyPr>
           <a:lstStyle/>
@@ -4462,7 +4454,7 @@
               </a:lnSpc>
             </a:pPr>
             <a:r>
-              <a:rPr lang="en-US" b="true" sz="6600">
+              <a:rPr lang="en-US" sz="6600" b="1">
                 <a:solidFill>
                   <a:srgbClr val="21625D"/>
                 </a:solidFill>
@@ -4478,12 +4470,12 @@
       </p:sp>
       <p:sp>
         <p:nvSpPr>
-          <p:cNvPr name="Freeform 5" id="5"/>
+          <p:cNvPr id="5" name="Freeform 5"/>
           <p:cNvSpPr/>
           <p:nvPr/>
         </p:nvSpPr>
         <p:spPr>
-          <a:xfrm flipH="false" flipV="false" rot="0">
+          <a:xfrm>
             <a:off x="-2481731" y="5907492"/>
             <a:ext cx="4366159" cy="5584622"/>
           </a:xfrm>
@@ -4492,9 +4484,9 @@
             <a:gdLst/>
             <a:ahLst/>
             <a:cxnLst/>
-            <a:rect r="r" b="b" t="t" l="l"/>
+            <a:rect l="l" t="t" r="r" b="b"/>
             <a:pathLst>
-              <a:path h="5584622" w="4366159">
+              <a:path w="4366159" h="5584622">
                 <a:moveTo>
                   <a:pt x="0" y="0"/>
                 </a:moveTo>
@@ -4523,19 +4515,19 @@
               </a:extLst>
             </a:blip>
             <a:stretch>
-              <a:fillRect l="0" t="0" r="0" b="0"/>
+              <a:fillRect/>
             </a:stretch>
           </a:blipFill>
         </p:spPr>
       </p:sp>
       <p:sp>
         <p:nvSpPr>
-          <p:cNvPr name="Freeform 6" id="6"/>
+          <p:cNvPr id="6" name="Freeform 6"/>
           <p:cNvSpPr/>
           <p:nvPr/>
         </p:nvSpPr>
         <p:spPr>
-          <a:xfrm flipH="false" flipV="false" rot="0">
+          <a:xfrm>
             <a:off x="15693892" y="-1205114"/>
             <a:ext cx="4418360" cy="5651391"/>
           </a:xfrm>
@@ -4544,9 +4536,9 @@
             <a:gdLst/>
             <a:ahLst/>
             <a:cxnLst/>
-            <a:rect r="r" b="b" t="t" l="l"/>
+            <a:rect l="l" t="t" r="r" b="b"/>
             <a:pathLst>
-              <a:path h="5651391" w="4418360">
+              <a:path w="4418360" h="5651391">
                 <a:moveTo>
                   <a:pt x="0" y="0"/>
                 </a:moveTo>
@@ -4575,19 +4567,19 @@
               </a:extLst>
             </a:blip>
             <a:stretch>
-              <a:fillRect l="0" t="0" r="0" b="0"/>
+              <a:fillRect/>
             </a:stretch>
           </a:blipFill>
         </p:spPr>
       </p:sp>
       <p:sp>
         <p:nvSpPr>
-          <p:cNvPr name="TextBox 7" id="7"/>
-          <p:cNvSpPr txBox="true"/>
+          <p:cNvPr id="7" name="TextBox 7"/>
+          <p:cNvSpPr txBox="1"/>
           <p:nvPr/>
         </p:nvSpPr>
         <p:spPr>
-          <a:xfrm rot="0">
+          <a:xfrm>
             <a:off x="2658509" y="3969707"/>
             <a:ext cx="13035383" cy="3691404"/>
           </a:xfrm>
@@ -4596,12 +4588,12 @@
           </a:prstGeom>
         </p:spPr>
         <p:txBody>
-          <a:bodyPr anchor="t" rtlCol="false" tIns="0" lIns="0" bIns="0" rIns="0">
+          <a:bodyPr lIns="0" tIns="0" rIns="0" bIns="0" rtlCol="0" anchor="t">
             <a:spAutoFit/>
           </a:bodyPr>
           <a:lstStyle/>
           <a:p>
-            <a:pPr algn="l" marL="590753" indent="-295376" lvl="1">
+            <a:pPr marL="590753" lvl="1" indent="-295376" algn="l">
               <a:lnSpc>
                 <a:spcPts val="3119"/>
               </a:lnSpc>
@@ -4622,7 +4614,7 @@
             </a:r>
           </a:p>
           <a:p>
-            <a:pPr algn="l" marL="590753" indent="-295376" lvl="1">
+            <a:pPr marL="590753" lvl="1" indent="-295376" algn="l">
               <a:lnSpc>
                 <a:spcPts val="3119"/>
               </a:lnSpc>
@@ -4643,7 +4635,7 @@
             </a:r>
           </a:p>
           <a:p>
-            <a:pPr algn="l" marL="590753" indent="-295376" lvl="1">
+            <a:pPr marL="590753" lvl="1" indent="-295376" algn="l">
               <a:lnSpc>
                 <a:spcPts val="3119"/>
               </a:lnSpc>
@@ -4664,7 +4656,7 @@
             </a:r>
           </a:p>
           <a:p>
-            <a:pPr algn="l" marL="590753" indent="-295376" lvl="1">
+            <a:pPr marL="590753" lvl="1" indent="-295376" algn="l">
               <a:lnSpc>
                 <a:spcPts val="3119"/>
               </a:lnSpc>
@@ -4690,6 +4682,15 @@
                 <a:spcPts val="4145"/>
               </a:lnSpc>
             </a:pPr>
+            <a:endParaRPr lang="en-US" sz="2736">
+              <a:solidFill>
+                <a:srgbClr val="21625D"/>
+              </a:solidFill>
+              <a:latin typeface="Poppins"/>
+              <a:ea typeface="Poppins"/>
+              <a:cs typeface="Poppins"/>
+              <a:sym typeface="Poppins"/>
+            </a:endParaRPr>
           </a:p>
         </p:txBody>
       </p:sp>
@@ -4702,7 +4703,7 @@
 </file>
 
 <file path=ppt/slides/slide2.xml><?xml version="1.0" encoding="utf-8"?>
-<p:sld xmlns:p="http://schemas.openxmlformats.org/presentationml/2006/main" xmlns:a="http://schemas.openxmlformats.org/drawingml/2006/main" xmlns:r="http://schemas.openxmlformats.org/officeDocument/2006/relationships">
+<p:sld xmlns:a="http://schemas.openxmlformats.org/drawingml/2006/main" xmlns:r="http://schemas.openxmlformats.org/officeDocument/2006/relationships" xmlns:p="http://schemas.openxmlformats.org/presentationml/2006/main">
   <p:cSld>
     <p:spTree>
       <p:nvGrpSpPr>
@@ -4720,12 +4721,12 @@
       </p:grpSpPr>
       <p:sp>
         <p:nvSpPr>
-          <p:cNvPr name="Freeform 2" id="2"/>
+          <p:cNvPr id="2" name="Freeform 2"/>
           <p:cNvSpPr/>
           <p:nvPr/>
         </p:nvSpPr>
         <p:spPr>
-          <a:xfrm flipH="false" flipV="false" rot="0">
+          <a:xfrm>
             <a:off x="-804624" y="-1856884"/>
             <a:ext cx="4471271" cy="4738341"/>
           </a:xfrm>
@@ -4734,9 +4735,9 @@
             <a:gdLst/>
             <a:ahLst/>
             <a:cxnLst/>
-            <a:rect r="r" b="b" t="t" l="l"/>
+            <a:rect l="l" t="t" r="r" b="b"/>
             <a:pathLst>
-              <a:path h="4738341" w="4471271">
+              <a:path w="4471271" h="4738341">
                 <a:moveTo>
                   <a:pt x="0" y="0"/>
                 </a:moveTo>
@@ -4765,19 +4766,19 @@
               </a:extLst>
             </a:blip>
             <a:stretch>
-              <a:fillRect l="0" t="0" r="0" b="0"/>
+              <a:fillRect/>
             </a:stretch>
           </a:blipFill>
         </p:spPr>
       </p:sp>
       <p:sp>
         <p:nvSpPr>
-          <p:cNvPr name="Freeform 3" id="3"/>
+          <p:cNvPr id="3" name="Freeform 3"/>
           <p:cNvSpPr/>
           <p:nvPr/>
         </p:nvSpPr>
         <p:spPr>
-          <a:xfrm flipH="false" flipV="false" rot="0">
+          <a:xfrm>
             <a:off x="14306075" y="8267015"/>
             <a:ext cx="4332928" cy="4591735"/>
           </a:xfrm>
@@ -4786,9 +4787,9 @@
             <a:gdLst/>
             <a:ahLst/>
             <a:cxnLst/>
-            <a:rect r="r" b="b" t="t" l="l"/>
+            <a:rect l="l" t="t" r="r" b="b"/>
             <a:pathLst>
-              <a:path h="4591735" w="4332928">
+              <a:path w="4332928" h="4591735">
                 <a:moveTo>
                   <a:pt x="0" y="0"/>
                 </a:moveTo>
@@ -4817,19 +4818,19 @@
               </a:extLst>
             </a:blip>
             <a:stretch>
-              <a:fillRect l="0" t="0" r="0" b="0"/>
+              <a:fillRect/>
             </a:stretch>
           </a:blipFill>
         </p:spPr>
       </p:sp>
       <p:sp>
         <p:nvSpPr>
-          <p:cNvPr name="TextBox 4" id="4"/>
-          <p:cNvSpPr txBox="true"/>
+          <p:cNvPr id="4" name="TextBox 4"/>
+          <p:cNvSpPr txBox="1"/>
           <p:nvPr/>
         </p:nvSpPr>
         <p:spPr>
-          <a:xfrm rot="0">
+          <a:xfrm>
             <a:off x="5452269" y="1859615"/>
             <a:ext cx="7383461" cy="1021842"/>
           </a:xfrm>
@@ -4838,7 +4839,7 @@
           </a:prstGeom>
         </p:spPr>
         <p:txBody>
-          <a:bodyPr anchor="t" rtlCol="false" tIns="0" lIns="0" bIns="0" rIns="0">
+          <a:bodyPr lIns="0" tIns="0" rIns="0" bIns="0" rtlCol="0" anchor="t">
             <a:spAutoFit/>
           </a:bodyPr>
           <a:lstStyle/>
@@ -4849,7 +4850,7 @@
               </a:lnSpc>
             </a:pPr>
             <a:r>
-              <a:rPr lang="en-US" sz="6600" b="true">
+              <a:rPr lang="en-US" sz="6600" b="1">
                 <a:solidFill>
                   <a:srgbClr val="21625D"/>
                 </a:solidFill>
@@ -4865,12 +4866,12 @@
       </p:sp>
       <p:sp>
         <p:nvSpPr>
-          <p:cNvPr name="Freeform 5" id="5"/>
+          <p:cNvPr id="5" name="Freeform 5"/>
           <p:cNvSpPr/>
           <p:nvPr/>
         </p:nvSpPr>
         <p:spPr>
-          <a:xfrm flipH="false" flipV="false" rot="0">
+          <a:xfrm>
             <a:off x="-2481731" y="5907492"/>
             <a:ext cx="4366159" cy="5584622"/>
           </a:xfrm>
@@ -4879,9 +4880,9 @@
             <a:gdLst/>
             <a:ahLst/>
             <a:cxnLst/>
-            <a:rect r="r" b="b" t="t" l="l"/>
+            <a:rect l="l" t="t" r="r" b="b"/>
             <a:pathLst>
-              <a:path h="5584622" w="4366159">
+              <a:path w="4366159" h="5584622">
                 <a:moveTo>
                   <a:pt x="0" y="0"/>
                 </a:moveTo>
@@ -4910,19 +4911,19 @@
               </a:extLst>
             </a:blip>
             <a:stretch>
-              <a:fillRect l="0" t="0" r="0" b="0"/>
+              <a:fillRect/>
             </a:stretch>
           </a:blipFill>
         </p:spPr>
       </p:sp>
       <p:sp>
         <p:nvSpPr>
-          <p:cNvPr name="Freeform 6" id="6"/>
+          <p:cNvPr id="6" name="Freeform 6"/>
           <p:cNvSpPr/>
           <p:nvPr/>
         </p:nvSpPr>
         <p:spPr>
-          <a:xfrm flipH="false" flipV="false" rot="0">
+          <a:xfrm>
             <a:off x="15693892" y="-1205114"/>
             <a:ext cx="4418360" cy="5651391"/>
           </a:xfrm>
@@ -4931,9 +4932,9 @@
             <a:gdLst/>
             <a:ahLst/>
             <a:cxnLst/>
-            <a:rect r="r" b="b" t="t" l="l"/>
+            <a:rect l="l" t="t" r="r" b="b"/>
             <a:pathLst>
-              <a:path h="5651391" w="4418360">
+              <a:path w="4418360" h="5651391">
                 <a:moveTo>
                   <a:pt x="0" y="0"/>
                 </a:moveTo>
@@ -4962,19 +4963,19 @@
               </a:extLst>
             </a:blip>
             <a:stretch>
-              <a:fillRect l="0" t="0" r="0" b="0"/>
+              <a:fillRect/>
             </a:stretch>
           </a:blipFill>
         </p:spPr>
       </p:sp>
       <p:sp>
         <p:nvSpPr>
-          <p:cNvPr name="TextBox 7" id="7"/>
-          <p:cNvSpPr txBox="true"/>
+          <p:cNvPr id="7" name="TextBox 7"/>
+          <p:cNvSpPr txBox="1"/>
           <p:nvPr/>
         </p:nvSpPr>
         <p:spPr>
-          <a:xfrm rot="0">
+          <a:xfrm>
             <a:off x="2626309" y="3717295"/>
             <a:ext cx="13035383" cy="5799858"/>
           </a:xfrm>
@@ -4983,7 +4984,7 @@
           </a:prstGeom>
         </p:spPr>
         <p:txBody>
-          <a:bodyPr anchor="t" rtlCol="false" tIns="0" lIns="0" bIns="0" rIns="0">
+          <a:bodyPr lIns="0" tIns="0" rIns="0" bIns="0" rtlCol="0" anchor="t">
             <a:spAutoFit/>
           </a:bodyPr>
           <a:lstStyle/>
@@ -5012,6 +5013,15 @@
                 <a:spcPts val="4145"/>
               </a:lnSpc>
             </a:pPr>
+            <a:endParaRPr lang="en-US" sz="3636">
+              <a:solidFill>
+                <a:srgbClr val="21625D"/>
+              </a:solidFill>
+              <a:latin typeface="Poppins"/>
+              <a:ea typeface="Poppins"/>
+              <a:cs typeface="Poppins"/>
+              <a:sym typeface="Poppins"/>
+            </a:endParaRPr>
           </a:p>
           <a:p>
             <a:pPr algn="just">
@@ -5038,6 +5048,15 @@
                 <a:spcPts val="4145"/>
               </a:lnSpc>
             </a:pPr>
+            <a:endParaRPr lang="en-US" sz="3636">
+              <a:solidFill>
+                <a:srgbClr val="21625D"/>
+              </a:solidFill>
+              <a:latin typeface="Poppins"/>
+              <a:ea typeface="Poppins"/>
+              <a:cs typeface="Poppins"/>
+              <a:sym typeface="Poppins"/>
+            </a:endParaRPr>
           </a:p>
           <a:p>
             <a:pPr algn="just">
@@ -5064,6 +5083,15 @@
                 <a:spcPts val="4145"/>
               </a:lnSpc>
             </a:pPr>
+            <a:endParaRPr lang="en-US" sz="3636">
+              <a:solidFill>
+                <a:srgbClr val="21625D"/>
+              </a:solidFill>
+              <a:latin typeface="Poppins"/>
+              <a:ea typeface="Poppins"/>
+              <a:cs typeface="Poppins"/>
+              <a:sym typeface="Poppins"/>
+            </a:endParaRPr>
           </a:p>
         </p:txBody>
       </p:sp>
@@ -5076,7 +5104,7 @@
 </file>
 
 <file path=ppt/slides/slide3.xml><?xml version="1.0" encoding="utf-8"?>
-<p:sld xmlns:p="http://schemas.openxmlformats.org/presentationml/2006/main" xmlns:a="http://schemas.openxmlformats.org/drawingml/2006/main" xmlns:r="http://schemas.openxmlformats.org/officeDocument/2006/relationships">
+<p:sld xmlns:a="http://schemas.openxmlformats.org/drawingml/2006/main" xmlns:r="http://schemas.openxmlformats.org/officeDocument/2006/relationships" xmlns:p="http://schemas.openxmlformats.org/presentationml/2006/main">
   <p:cSld>
     <p:spTree>
       <p:nvGrpSpPr>
@@ -5094,12 +5122,12 @@
       </p:grpSpPr>
       <p:sp>
         <p:nvSpPr>
-          <p:cNvPr name="Freeform 2" id="2"/>
+          <p:cNvPr id="2" name="Freeform 2"/>
           <p:cNvSpPr/>
           <p:nvPr/>
         </p:nvSpPr>
         <p:spPr>
-          <a:xfrm flipH="false" flipV="false" rot="0">
+          <a:xfrm>
             <a:off x="-804624" y="-1856884"/>
             <a:ext cx="4471271" cy="4738341"/>
           </a:xfrm>
@@ -5108,9 +5136,9 @@
             <a:gdLst/>
             <a:ahLst/>
             <a:cxnLst/>
-            <a:rect r="r" b="b" t="t" l="l"/>
+            <a:rect l="l" t="t" r="r" b="b"/>
             <a:pathLst>
-              <a:path h="4738341" w="4471271">
+              <a:path w="4471271" h="4738341">
                 <a:moveTo>
                   <a:pt x="0" y="0"/>
                 </a:moveTo>
@@ -5139,19 +5167,19 @@
               </a:extLst>
             </a:blip>
             <a:stretch>
-              <a:fillRect l="0" t="0" r="0" b="0"/>
+              <a:fillRect/>
             </a:stretch>
           </a:blipFill>
         </p:spPr>
       </p:sp>
       <p:sp>
         <p:nvSpPr>
-          <p:cNvPr name="Freeform 3" id="3"/>
+          <p:cNvPr id="3" name="Freeform 3"/>
           <p:cNvSpPr/>
           <p:nvPr/>
         </p:nvSpPr>
         <p:spPr>
-          <a:xfrm flipH="false" flipV="false" rot="0">
+          <a:xfrm>
             <a:off x="14306075" y="8267015"/>
             <a:ext cx="4332928" cy="4591735"/>
           </a:xfrm>
@@ -5160,9 +5188,9 @@
             <a:gdLst/>
             <a:ahLst/>
             <a:cxnLst/>
-            <a:rect r="r" b="b" t="t" l="l"/>
+            <a:rect l="l" t="t" r="r" b="b"/>
             <a:pathLst>
-              <a:path h="4591735" w="4332928">
+              <a:path w="4332928" h="4591735">
                 <a:moveTo>
                   <a:pt x="0" y="0"/>
                 </a:moveTo>
@@ -5191,19 +5219,19 @@
               </a:extLst>
             </a:blip>
             <a:stretch>
-              <a:fillRect l="0" t="0" r="0" b="0"/>
+              <a:fillRect/>
             </a:stretch>
           </a:blipFill>
         </p:spPr>
       </p:sp>
       <p:sp>
         <p:nvSpPr>
-          <p:cNvPr name="Freeform 4" id="4"/>
+          <p:cNvPr id="4" name="Freeform 4"/>
           <p:cNvSpPr/>
           <p:nvPr/>
         </p:nvSpPr>
         <p:spPr>
-          <a:xfrm flipH="false" flipV="false" rot="0">
+          <a:xfrm>
             <a:off x="-2481731" y="5907492"/>
             <a:ext cx="4366159" cy="5584622"/>
           </a:xfrm>
@@ -5212,9 +5240,9 @@
             <a:gdLst/>
             <a:ahLst/>
             <a:cxnLst/>
-            <a:rect r="r" b="b" t="t" l="l"/>
+            <a:rect l="l" t="t" r="r" b="b"/>
             <a:pathLst>
-              <a:path h="5584622" w="4366159">
+              <a:path w="4366159" h="5584622">
                 <a:moveTo>
                   <a:pt x="0" y="0"/>
                 </a:moveTo>
@@ -5243,19 +5271,19 @@
               </a:extLst>
             </a:blip>
             <a:stretch>
-              <a:fillRect l="0" t="0" r="0" b="0"/>
+              <a:fillRect/>
             </a:stretch>
           </a:blipFill>
         </p:spPr>
       </p:sp>
       <p:sp>
         <p:nvSpPr>
-          <p:cNvPr name="Freeform 5" id="5"/>
+          <p:cNvPr id="5" name="Freeform 5"/>
           <p:cNvSpPr/>
           <p:nvPr/>
         </p:nvSpPr>
         <p:spPr>
-          <a:xfrm flipH="false" flipV="false" rot="0">
+          <a:xfrm>
             <a:off x="15693892" y="-1205114"/>
             <a:ext cx="4418360" cy="5651391"/>
           </a:xfrm>
@@ -5264,9 +5292,9 @@
             <a:gdLst/>
             <a:ahLst/>
             <a:cxnLst/>
-            <a:rect r="r" b="b" t="t" l="l"/>
+            <a:rect l="l" t="t" r="r" b="b"/>
             <a:pathLst>
-              <a:path h="5651391" w="4418360">
+              <a:path w="4418360" h="5651391">
                 <a:moveTo>
                   <a:pt x="0" y="0"/>
                 </a:moveTo>
@@ -5295,19 +5323,19 @@
               </a:extLst>
             </a:blip>
             <a:stretch>
-              <a:fillRect l="0" t="0" r="0" b="0"/>
+              <a:fillRect/>
             </a:stretch>
           </a:blipFill>
         </p:spPr>
       </p:sp>
       <p:sp>
         <p:nvSpPr>
-          <p:cNvPr name="Freeform 6" id="6"/>
+          <p:cNvPr id="6" name="Freeform 6"/>
           <p:cNvSpPr/>
           <p:nvPr/>
         </p:nvSpPr>
         <p:spPr>
-          <a:xfrm flipH="false" flipV="false" rot="0">
+          <a:xfrm>
             <a:off x="5654434" y="1028700"/>
             <a:ext cx="4140292" cy="2422071"/>
           </a:xfrm>
@@ -5316,9 +5344,9 @@
             <a:gdLst/>
             <a:ahLst/>
             <a:cxnLst/>
-            <a:rect r="r" b="b" t="t" l="l"/>
+            <a:rect l="l" t="t" r="r" b="b"/>
             <a:pathLst>
-              <a:path h="2422071" w="4140292">
+              <a:path w="4140292" h="2422071">
                 <a:moveTo>
                   <a:pt x="0" y="0"/>
                 </a:moveTo>
@@ -5347,19 +5375,19 @@
               </a:extLst>
             </a:blip>
             <a:stretch>
-              <a:fillRect l="0" t="0" r="0" b="0"/>
+              <a:fillRect/>
             </a:stretch>
           </a:blipFill>
         </p:spPr>
       </p:sp>
       <p:sp>
         <p:nvSpPr>
-          <p:cNvPr name="TextBox 7" id="7"/>
-          <p:cNvSpPr txBox="true"/>
+          <p:cNvPr id="7" name="TextBox 7"/>
+          <p:cNvSpPr txBox="1"/>
           <p:nvPr/>
         </p:nvSpPr>
         <p:spPr>
-          <a:xfrm rot="0">
+          <a:xfrm>
             <a:off x="2626309" y="4436752"/>
             <a:ext cx="13035383" cy="3704358"/>
           </a:xfrm>
@@ -5368,12 +5396,12 @@
           </a:prstGeom>
         </p:spPr>
         <p:txBody>
-          <a:bodyPr anchor="t" rtlCol="false" tIns="0" lIns="0" bIns="0" rIns="0">
+          <a:bodyPr lIns="0" tIns="0" rIns="0" bIns="0" rtlCol="0" anchor="t">
             <a:spAutoFit/>
           </a:bodyPr>
           <a:lstStyle/>
           <a:p>
-            <a:pPr algn="just" marL="785058" indent="-392529" lvl="1">
+            <a:pPr marL="785058" lvl="1" indent="-392529" algn="just">
               <a:lnSpc>
                 <a:spcPts val="4145"/>
               </a:lnSpc>
@@ -5394,7 +5422,7 @@
             </a:r>
           </a:p>
           <a:p>
-            <a:pPr algn="just" marL="785058" indent="-392529" lvl="1">
+            <a:pPr marL="785058" lvl="1" indent="-392529" algn="just">
               <a:lnSpc>
                 <a:spcPts val="4145"/>
               </a:lnSpc>
@@ -5415,7 +5443,7 @@
             </a:r>
           </a:p>
           <a:p>
-            <a:pPr algn="just" marL="785058" indent="-392529" lvl="1">
+            <a:pPr marL="785058" lvl="1" indent="-392529" algn="just">
               <a:lnSpc>
                 <a:spcPts val="4145"/>
               </a:lnSpc>
@@ -5441,6 +5469,15 @@
                 <a:spcPts val="4145"/>
               </a:lnSpc>
             </a:pPr>
+            <a:endParaRPr lang="en-US" sz="3636">
+              <a:solidFill>
+                <a:srgbClr val="21625D"/>
+              </a:solidFill>
+              <a:latin typeface="Poppins"/>
+              <a:ea typeface="Poppins"/>
+              <a:cs typeface="Poppins"/>
+              <a:sym typeface="Poppins"/>
+            </a:endParaRPr>
           </a:p>
         </p:txBody>
       </p:sp>
@@ -5453,7 +5490,7 @@
 </file>
 
 <file path=ppt/slides/slide4.xml><?xml version="1.0" encoding="utf-8"?>
-<p:sld xmlns:p="http://schemas.openxmlformats.org/presentationml/2006/main" xmlns:a="http://schemas.openxmlformats.org/drawingml/2006/main" xmlns:r="http://schemas.openxmlformats.org/officeDocument/2006/relationships">
+<p:sld xmlns:a="http://schemas.openxmlformats.org/drawingml/2006/main" xmlns:r="http://schemas.openxmlformats.org/officeDocument/2006/relationships" xmlns:p="http://schemas.openxmlformats.org/presentationml/2006/main">
   <p:cSld>
     <p:spTree>
       <p:nvGrpSpPr>
@@ -5471,12 +5508,12 @@
       </p:grpSpPr>
       <p:sp>
         <p:nvSpPr>
-          <p:cNvPr name="Freeform 2" id="2"/>
+          <p:cNvPr id="2" name="Freeform 2"/>
           <p:cNvSpPr/>
           <p:nvPr/>
         </p:nvSpPr>
         <p:spPr>
-          <a:xfrm flipH="false" flipV="false" rot="0">
+          <a:xfrm>
             <a:off x="-804624" y="-1856884"/>
             <a:ext cx="4471271" cy="4738341"/>
           </a:xfrm>
@@ -5485,9 +5522,9 @@
             <a:gdLst/>
             <a:ahLst/>
             <a:cxnLst/>
-            <a:rect r="r" b="b" t="t" l="l"/>
+            <a:rect l="l" t="t" r="r" b="b"/>
             <a:pathLst>
-              <a:path h="4738341" w="4471271">
+              <a:path w="4471271" h="4738341">
                 <a:moveTo>
                   <a:pt x="0" y="0"/>
                 </a:moveTo>
@@ -5516,19 +5553,19 @@
               </a:extLst>
             </a:blip>
             <a:stretch>
-              <a:fillRect l="0" t="0" r="0" b="0"/>
+              <a:fillRect/>
             </a:stretch>
           </a:blipFill>
         </p:spPr>
       </p:sp>
       <p:sp>
         <p:nvSpPr>
-          <p:cNvPr name="Freeform 3" id="3"/>
+          <p:cNvPr id="3" name="Freeform 3"/>
           <p:cNvSpPr/>
           <p:nvPr/>
         </p:nvSpPr>
         <p:spPr>
-          <a:xfrm flipH="false" flipV="false" rot="0">
+          <a:xfrm>
             <a:off x="14306075" y="8267015"/>
             <a:ext cx="4332928" cy="4591735"/>
           </a:xfrm>
@@ -5537,9 +5574,9 @@
             <a:gdLst/>
             <a:ahLst/>
             <a:cxnLst/>
-            <a:rect r="r" b="b" t="t" l="l"/>
+            <a:rect l="l" t="t" r="r" b="b"/>
             <a:pathLst>
-              <a:path h="4591735" w="4332928">
+              <a:path w="4332928" h="4591735">
                 <a:moveTo>
                   <a:pt x="0" y="0"/>
                 </a:moveTo>
@@ -5568,19 +5605,19 @@
               </a:extLst>
             </a:blip>
             <a:stretch>
-              <a:fillRect l="0" t="0" r="0" b="0"/>
+              <a:fillRect/>
             </a:stretch>
           </a:blipFill>
         </p:spPr>
       </p:sp>
       <p:sp>
         <p:nvSpPr>
-          <p:cNvPr name="Freeform 4" id="4"/>
+          <p:cNvPr id="4" name="Freeform 4"/>
           <p:cNvSpPr/>
           <p:nvPr/>
         </p:nvSpPr>
         <p:spPr>
-          <a:xfrm flipH="false" flipV="false" rot="0">
+          <a:xfrm>
             <a:off x="-2481731" y="5907492"/>
             <a:ext cx="4366159" cy="5584622"/>
           </a:xfrm>
@@ -5589,9 +5626,9 @@
             <a:gdLst/>
             <a:ahLst/>
             <a:cxnLst/>
-            <a:rect r="r" b="b" t="t" l="l"/>
+            <a:rect l="l" t="t" r="r" b="b"/>
             <a:pathLst>
-              <a:path h="5584622" w="4366159">
+              <a:path w="4366159" h="5584622">
                 <a:moveTo>
                   <a:pt x="0" y="0"/>
                 </a:moveTo>
@@ -5620,19 +5657,19 @@
               </a:extLst>
             </a:blip>
             <a:stretch>
-              <a:fillRect l="0" t="0" r="0" b="0"/>
+              <a:fillRect/>
             </a:stretch>
           </a:blipFill>
         </p:spPr>
       </p:sp>
       <p:sp>
         <p:nvSpPr>
-          <p:cNvPr name="Freeform 5" id="5"/>
+          <p:cNvPr id="5" name="Freeform 5"/>
           <p:cNvSpPr/>
           <p:nvPr/>
         </p:nvSpPr>
         <p:spPr>
-          <a:xfrm flipH="false" flipV="false" rot="0">
+          <a:xfrm>
             <a:off x="15693892" y="-1205114"/>
             <a:ext cx="4418360" cy="5651391"/>
           </a:xfrm>
@@ -5641,9 +5678,9 @@
             <a:gdLst/>
             <a:ahLst/>
             <a:cxnLst/>
-            <a:rect r="r" b="b" t="t" l="l"/>
+            <a:rect l="l" t="t" r="r" b="b"/>
             <a:pathLst>
-              <a:path h="5651391" w="4418360">
+              <a:path w="4418360" h="5651391">
                 <a:moveTo>
                   <a:pt x="0" y="0"/>
                 </a:moveTo>
@@ -5672,19 +5709,19 @@
               </a:extLst>
             </a:blip>
             <a:stretch>
-              <a:fillRect l="0" t="0" r="0" b="0"/>
+              <a:fillRect/>
             </a:stretch>
           </a:blipFill>
         </p:spPr>
       </p:sp>
       <p:sp>
         <p:nvSpPr>
-          <p:cNvPr name="TextBox 6" id="6"/>
-          <p:cNvSpPr txBox="true"/>
+          <p:cNvPr id="6" name="TextBox 6"/>
+          <p:cNvSpPr txBox="1"/>
           <p:nvPr/>
         </p:nvSpPr>
         <p:spPr>
-          <a:xfrm rot="0">
+          <a:xfrm>
             <a:off x="4255531" y="1601532"/>
             <a:ext cx="12217008" cy="1021842"/>
           </a:xfrm>
@@ -5693,7 +5730,7 @@
           </a:prstGeom>
         </p:spPr>
         <p:txBody>
-          <a:bodyPr anchor="t" rtlCol="false" tIns="0" lIns="0" bIns="0" rIns="0">
+          <a:bodyPr lIns="0" tIns="0" rIns="0" bIns="0" rtlCol="0" anchor="t">
             <a:spAutoFit/>
           </a:bodyPr>
           <a:lstStyle/>
@@ -5704,7 +5741,7 @@
               </a:lnSpc>
             </a:pPr>
             <a:r>
-              <a:rPr lang="en-US" sz="6600" b="true">
+              <a:rPr lang="en-US" sz="6600" b="1">
                 <a:solidFill>
                   <a:srgbClr val="21625D"/>
                 </a:solidFill>
@@ -5720,12 +5757,12 @@
       </p:sp>
       <p:sp>
         <p:nvSpPr>
-          <p:cNvPr name="TextBox 7" id="7"/>
-          <p:cNvSpPr txBox="true"/>
+          <p:cNvPr id="7" name="TextBox 7"/>
+          <p:cNvSpPr txBox="1"/>
           <p:nvPr/>
         </p:nvSpPr>
         <p:spPr>
-          <a:xfrm rot="0">
+          <a:xfrm>
             <a:off x="2658509" y="3375148"/>
             <a:ext cx="13814030" cy="3704358"/>
           </a:xfrm>
@@ -5734,7 +5771,7 @@
           </a:prstGeom>
         </p:spPr>
         <p:txBody>
-          <a:bodyPr anchor="t" rtlCol="false" tIns="0" lIns="0" bIns="0" rIns="0">
+          <a:bodyPr lIns="0" tIns="0" rIns="0" bIns="0" rtlCol="0" anchor="t">
             <a:spAutoFit/>
           </a:bodyPr>
           <a:lstStyle/>
@@ -5763,6 +5800,15 @@
                 <a:spcPts val="4145"/>
               </a:lnSpc>
             </a:pPr>
+            <a:endParaRPr lang="en-US" sz="3636">
+              <a:solidFill>
+                <a:srgbClr val="21625D"/>
+              </a:solidFill>
+              <a:latin typeface="Poppins"/>
+              <a:ea typeface="Poppins"/>
+              <a:cs typeface="Poppins"/>
+              <a:sym typeface="Poppins"/>
+            </a:endParaRPr>
           </a:p>
           <a:p>
             <a:pPr algn="just">
@@ -5780,19 +5826,7 @@
                 <a:cs typeface="Poppins"/>
                 <a:sym typeface="Poppins"/>
               </a:rPr>
-              <a:t>Seti</a:t>
-            </a:r>
-            <a:r>
-              <a:rPr lang="en-US" sz="3636">
-                <a:solidFill>
-                  <a:srgbClr val="21625D"/>
-                </a:solidFill>
-                <a:latin typeface="Poppins"/>
-                <a:ea typeface="Poppins"/>
-                <a:cs typeface="Poppins"/>
-                <a:sym typeface="Poppins"/>
-              </a:rPr>
-              <a:t>ap jenis media memiliki peran yang berbeda dalam membantu pemahaman peserta didik.</a:t>
+              <a:t>Setiap jenis media memiliki peran yang berbeda dalam membantu pemahaman peserta didik.</a:t>
             </a:r>
           </a:p>
           <a:p>
@@ -5801,6 +5835,15 @@
                 <a:spcPts val="4145"/>
               </a:lnSpc>
             </a:pPr>
+            <a:endParaRPr lang="en-US" sz="3636">
+              <a:solidFill>
+                <a:srgbClr val="21625D"/>
+              </a:solidFill>
+              <a:latin typeface="Poppins"/>
+              <a:ea typeface="Poppins"/>
+              <a:cs typeface="Poppins"/>
+              <a:sym typeface="Poppins"/>
+            </a:endParaRPr>
           </a:p>
         </p:txBody>
       </p:sp>
@@ -5813,7 +5856,7 @@
 </file>
 
 <file path=ppt/slides/slide5.xml><?xml version="1.0" encoding="utf-8"?>
-<p:sld xmlns:p="http://schemas.openxmlformats.org/presentationml/2006/main" xmlns:a="http://schemas.openxmlformats.org/drawingml/2006/main" xmlns:r="http://schemas.openxmlformats.org/officeDocument/2006/relationships">
+<p:sld xmlns:a="http://schemas.openxmlformats.org/drawingml/2006/main" xmlns:r="http://schemas.openxmlformats.org/officeDocument/2006/relationships" xmlns:p="http://schemas.openxmlformats.org/presentationml/2006/main">
   <p:cSld>
     <p:spTree>
       <p:nvGrpSpPr>
@@ -5831,12 +5874,12 @@
       </p:grpSpPr>
       <p:sp>
         <p:nvSpPr>
-          <p:cNvPr name="Freeform 2" id="2"/>
+          <p:cNvPr id="2" name="Freeform 2"/>
           <p:cNvSpPr/>
           <p:nvPr/>
         </p:nvSpPr>
         <p:spPr>
-          <a:xfrm flipH="false" flipV="false" rot="0">
+          <a:xfrm>
             <a:off x="-804624" y="-1856884"/>
             <a:ext cx="4471271" cy="4738341"/>
           </a:xfrm>
@@ -5845,9 +5888,9 @@
             <a:gdLst/>
             <a:ahLst/>
             <a:cxnLst/>
-            <a:rect r="r" b="b" t="t" l="l"/>
+            <a:rect l="l" t="t" r="r" b="b"/>
             <a:pathLst>
-              <a:path h="4738341" w="4471271">
+              <a:path w="4471271" h="4738341">
                 <a:moveTo>
                   <a:pt x="0" y="0"/>
                 </a:moveTo>
@@ -5876,19 +5919,19 @@
               </a:extLst>
             </a:blip>
             <a:stretch>
-              <a:fillRect l="0" t="0" r="0" b="0"/>
+              <a:fillRect/>
             </a:stretch>
           </a:blipFill>
         </p:spPr>
       </p:sp>
       <p:sp>
         <p:nvSpPr>
-          <p:cNvPr name="Freeform 3" id="3"/>
+          <p:cNvPr id="3" name="Freeform 3"/>
           <p:cNvSpPr/>
           <p:nvPr/>
         </p:nvSpPr>
         <p:spPr>
-          <a:xfrm flipH="false" flipV="false" rot="0">
+          <a:xfrm>
             <a:off x="14306075" y="8267015"/>
             <a:ext cx="4332928" cy="4591735"/>
           </a:xfrm>
@@ -5897,9 +5940,9 @@
             <a:gdLst/>
             <a:ahLst/>
             <a:cxnLst/>
-            <a:rect r="r" b="b" t="t" l="l"/>
+            <a:rect l="l" t="t" r="r" b="b"/>
             <a:pathLst>
-              <a:path h="4591735" w="4332928">
+              <a:path w="4332928" h="4591735">
                 <a:moveTo>
                   <a:pt x="0" y="0"/>
                 </a:moveTo>
@@ -5928,19 +5971,19 @@
               </a:extLst>
             </a:blip>
             <a:stretch>
-              <a:fillRect l="0" t="0" r="0" b="0"/>
+              <a:fillRect/>
             </a:stretch>
           </a:blipFill>
         </p:spPr>
       </p:sp>
       <p:sp>
         <p:nvSpPr>
-          <p:cNvPr name="Freeform 4" id="4"/>
+          <p:cNvPr id="4" name="Freeform 4"/>
           <p:cNvSpPr/>
           <p:nvPr/>
         </p:nvSpPr>
         <p:spPr>
-          <a:xfrm flipH="false" flipV="false" rot="0">
+          <a:xfrm>
             <a:off x="-2481731" y="5907492"/>
             <a:ext cx="4366159" cy="5584622"/>
           </a:xfrm>
@@ -5949,9 +5992,9 @@
             <a:gdLst/>
             <a:ahLst/>
             <a:cxnLst/>
-            <a:rect r="r" b="b" t="t" l="l"/>
+            <a:rect l="l" t="t" r="r" b="b"/>
             <a:pathLst>
-              <a:path h="5584622" w="4366159">
+              <a:path w="4366159" h="5584622">
                 <a:moveTo>
                   <a:pt x="0" y="0"/>
                 </a:moveTo>
@@ -5980,19 +6023,19 @@
               </a:extLst>
             </a:blip>
             <a:stretch>
-              <a:fillRect l="0" t="0" r="0" b="0"/>
+              <a:fillRect/>
             </a:stretch>
           </a:blipFill>
         </p:spPr>
       </p:sp>
       <p:sp>
         <p:nvSpPr>
-          <p:cNvPr name="Freeform 5" id="5"/>
+          <p:cNvPr id="5" name="Freeform 5"/>
           <p:cNvSpPr/>
           <p:nvPr/>
         </p:nvSpPr>
         <p:spPr>
-          <a:xfrm flipH="false" flipV="false" rot="0">
+          <a:xfrm>
             <a:off x="15693892" y="-1205114"/>
             <a:ext cx="4418360" cy="5651391"/>
           </a:xfrm>
@@ -6001,9 +6044,9 @@
             <a:gdLst/>
             <a:ahLst/>
             <a:cxnLst/>
-            <a:rect r="r" b="b" t="t" l="l"/>
+            <a:rect l="l" t="t" r="r" b="b"/>
             <a:pathLst>
-              <a:path h="5651391" w="4418360">
+              <a:path w="4418360" h="5651391">
                 <a:moveTo>
                   <a:pt x="0" y="0"/>
                 </a:moveTo>
@@ -6032,19 +6075,19 @@
               </a:extLst>
             </a:blip>
             <a:stretch>
-              <a:fillRect l="0" t="0" r="0" b="0"/>
+              <a:fillRect/>
             </a:stretch>
           </a:blipFill>
         </p:spPr>
       </p:sp>
       <p:sp>
         <p:nvSpPr>
-          <p:cNvPr name="TextBox 6" id="6"/>
-          <p:cNvSpPr txBox="true"/>
+          <p:cNvPr id="6" name="TextBox 6"/>
+          <p:cNvSpPr txBox="1"/>
           <p:nvPr/>
         </p:nvSpPr>
         <p:spPr>
-          <a:xfrm rot="0">
+          <a:xfrm>
             <a:off x="4255531" y="1601532"/>
             <a:ext cx="12217008" cy="1021842"/>
           </a:xfrm>
@@ -6053,7 +6096,7 @@
           </a:prstGeom>
         </p:spPr>
         <p:txBody>
-          <a:bodyPr anchor="t" rtlCol="false" tIns="0" lIns="0" bIns="0" rIns="0">
+          <a:bodyPr lIns="0" tIns="0" rIns="0" bIns="0" rtlCol="0" anchor="t">
             <a:spAutoFit/>
           </a:bodyPr>
           <a:lstStyle/>
@@ -6064,7 +6107,7 @@
               </a:lnSpc>
             </a:pPr>
             <a:r>
-              <a:rPr lang="en-US" sz="6600" b="true">
+              <a:rPr lang="en-US" sz="6600" b="1">
                 <a:solidFill>
                   <a:srgbClr val="21625D"/>
                 </a:solidFill>
@@ -6080,12 +6123,12 @@
       </p:sp>
       <p:sp>
         <p:nvSpPr>
-          <p:cNvPr name="TextBox 7" id="7"/>
-          <p:cNvSpPr txBox="true"/>
+          <p:cNvPr id="7" name="TextBox 7"/>
+          <p:cNvSpPr txBox="1"/>
           <p:nvPr/>
         </p:nvSpPr>
         <p:spPr>
-          <a:xfrm rot="0">
+          <a:xfrm>
             <a:off x="2658509" y="3810434"/>
             <a:ext cx="13814030" cy="4752108"/>
           </a:xfrm>
@@ -6094,7 +6137,7 @@
           </a:prstGeom>
         </p:spPr>
         <p:txBody>
-          <a:bodyPr anchor="t" rtlCol="false" tIns="0" lIns="0" bIns="0" rIns="0">
+          <a:bodyPr lIns="0" tIns="0" rIns="0" bIns="0" rtlCol="0" anchor="t">
             <a:spAutoFit/>
           </a:bodyPr>
           <a:lstStyle/>
@@ -6114,19 +6157,7 @@
                 <a:cs typeface="Poppins"/>
                 <a:sym typeface="Poppins"/>
               </a:rPr>
-              <a:t>Media</a:t>
-            </a:r>
-            <a:r>
-              <a:rPr lang="en-US" sz="3636">
-                <a:solidFill>
-                  <a:srgbClr val="21625D"/>
-                </a:solidFill>
-                <a:latin typeface="Poppins"/>
-                <a:ea typeface="Poppins"/>
-                <a:cs typeface="Poppins"/>
-                <a:sym typeface="Poppins"/>
-              </a:rPr>
-              <a:t> visual adalah media yang hanya dapat dilihat.</a:t>
+              <a:t>Media visual adalah media yang hanya dapat dilihat.</a:t>
             </a:r>
           </a:p>
           <a:p>
@@ -6135,6 +6166,15 @@
                 <a:spcPts val="4145"/>
               </a:lnSpc>
             </a:pPr>
+            <a:endParaRPr lang="en-US" sz="3636">
+              <a:solidFill>
+                <a:srgbClr val="21625D"/>
+              </a:solidFill>
+              <a:latin typeface="Poppins"/>
+              <a:ea typeface="Poppins"/>
+              <a:cs typeface="Poppins"/>
+              <a:sym typeface="Poppins"/>
+            </a:endParaRPr>
           </a:p>
           <a:p>
             <a:pPr algn="just">
@@ -6161,9 +6201,18 @@
                 <a:spcPts val="4145"/>
               </a:lnSpc>
             </a:pPr>
-          </a:p>
-          <a:p>
-            <a:pPr algn="just" marL="785058" indent="-392529" lvl="1">
+            <a:endParaRPr lang="en-US" sz="3636">
+              <a:solidFill>
+                <a:srgbClr val="21625D"/>
+              </a:solidFill>
+              <a:latin typeface="Poppins"/>
+              <a:ea typeface="Poppins"/>
+              <a:cs typeface="Poppins"/>
+              <a:sym typeface="Poppins"/>
+            </a:endParaRPr>
+          </a:p>
+          <a:p>
+            <a:pPr marL="785058" lvl="1" indent="-392529" algn="just">
               <a:lnSpc>
                 <a:spcPts val="4145"/>
               </a:lnSpc>
@@ -6184,7 +6233,7 @@
             </a:r>
           </a:p>
           <a:p>
-            <a:pPr algn="just" marL="785058" indent="-392529" lvl="1">
+            <a:pPr marL="785058" lvl="1" indent="-392529" algn="just">
               <a:lnSpc>
                 <a:spcPts val="4145"/>
               </a:lnSpc>
@@ -6205,7 +6254,7 @@
             </a:r>
           </a:p>
           <a:p>
-            <a:pPr algn="just" marL="785058" indent="-392529" lvl="1">
+            <a:pPr marL="785058" lvl="1" indent="-392529" algn="just">
               <a:lnSpc>
                 <a:spcPts val="4145"/>
               </a:lnSpc>
@@ -6226,7 +6275,7 @@
             </a:r>
           </a:p>
           <a:p>
-            <a:pPr algn="just" marL="785058" indent="-392529" lvl="1">
+            <a:pPr marL="785058" lvl="1" indent="-392529" algn="just">
               <a:lnSpc>
                 <a:spcPts val="4145"/>
               </a:lnSpc>
@@ -6252,6 +6301,15 @@
                 <a:spcPts val="4145"/>
               </a:lnSpc>
             </a:pPr>
+            <a:endParaRPr lang="en-US" sz="3636">
+              <a:solidFill>
+                <a:srgbClr val="21625D"/>
+              </a:solidFill>
+              <a:latin typeface="Poppins"/>
+              <a:ea typeface="Poppins"/>
+              <a:cs typeface="Poppins"/>
+              <a:sym typeface="Poppins"/>
+            </a:endParaRPr>
           </a:p>
         </p:txBody>
       </p:sp>
@@ -6264,7 +6322,7 @@
 </file>
 
 <file path=ppt/slides/slide6.xml><?xml version="1.0" encoding="utf-8"?>
-<p:sld xmlns:p="http://schemas.openxmlformats.org/presentationml/2006/main" xmlns:a="http://schemas.openxmlformats.org/drawingml/2006/main" xmlns:r="http://schemas.openxmlformats.org/officeDocument/2006/relationships">
+<p:sld xmlns:a="http://schemas.openxmlformats.org/drawingml/2006/main" xmlns:r="http://schemas.openxmlformats.org/officeDocument/2006/relationships" xmlns:p="http://schemas.openxmlformats.org/presentationml/2006/main">
   <p:cSld>
     <p:spTree>
       <p:nvGrpSpPr>
@@ -6282,12 +6340,12 @@
       </p:grpSpPr>
       <p:sp>
         <p:nvSpPr>
-          <p:cNvPr name="Freeform 2" id="2"/>
+          <p:cNvPr id="2" name="Freeform 2"/>
           <p:cNvSpPr/>
           <p:nvPr/>
         </p:nvSpPr>
         <p:spPr>
-          <a:xfrm flipH="false" flipV="false" rot="0">
+          <a:xfrm>
             <a:off x="-804624" y="-1856884"/>
             <a:ext cx="4471271" cy="4738341"/>
           </a:xfrm>
@@ -6296,9 +6354,9 @@
             <a:gdLst/>
             <a:ahLst/>
             <a:cxnLst/>
-            <a:rect r="r" b="b" t="t" l="l"/>
+            <a:rect l="l" t="t" r="r" b="b"/>
             <a:pathLst>
-              <a:path h="4738341" w="4471271">
+              <a:path w="4471271" h="4738341">
                 <a:moveTo>
                   <a:pt x="0" y="0"/>
                 </a:moveTo>
@@ -6327,19 +6385,19 @@
               </a:extLst>
             </a:blip>
             <a:stretch>
-              <a:fillRect l="0" t="0" r="0" b="0"/>
+              <a:fillRect/>
             </a:stretch>
           </a:blipFill>
         </p:spPr>
       </p:sp>
       <p:sp>
         <p:nvSpPr>
-          <p:cNvPr name="Freeform 3" id="3"/>
+          <p:cNvPr id="3" name="Freeform 3"/>
           <p:cNvSpPr/>
           <p:nvPr/>
         </p:nvSpPr>
         <p:spPr>
-          <a:xfrm flipH="false" flipV="false" rot="0">
+          <a:xfrm>
             <a:off x="14306075" y="8267015"/>
             <a:ext cx="4332928" cy="4591735"/>
           </a:xfrm>
@@ -6348,9 +6406,9 @@
             <a:gdLst/>
             <a:ahLst/>
             <a:cxnLst/>
-            <a:rect r="r" b="b" t="t" l="l"/>
+            <a:rect l="l" t="t" r="r" b="b"/>
             <a:pathLst>
-              <a:path h="4591735" w="4332928">
+              <a:path w="4332928" h="4591735">
                 <a:moveTo>
                   <a:pt x="0" y="0"/>
                 </a:moveTo>
@@ -6379,19 +6437,19 @@
               </a:extLst>
             </a:blip>
             <a:stretch>
-              <a:fillRect l="0" t="0" r="0" b="0"/>
+              <a:fillRect/>
             </a:stretch>
           </a:blipFill>
         </p:spPr>
       </p:sp>
       <p:sp>
         <p:nvSpPr>
-          <p:cNvPr name="Freeform 4" id="4"/>
+          <p:cNvPr id="4" name="Freeform 4"/>
           <p:cNvSpPr/>
           <p:nvPr/>
         </p:nvSpPr>
         <p:spPr>
-          <a:xfrm flipH="false" flipV="false" rot="0">
+          <a:xfrm>
             <a:off x="-2481731" y="5907492"/>
             <a:ext cx="4366159" cy="5584622"/>
           </a:xfrm>
@@ -6400,9 +6458,9 @@
             <a:gdLst/>
             <a:ahLst/>
             <a:cxnLst/>
-            <a:rect r="r" b="b" t="t" l="l"/>
+            <a:rect l="l" t="t" r="r" b="b"/>
             <a:pathLst>
-              <a:path h="5584622" w="4366159">
+              <a:path w="4366159" h="5584622">
                 <a:moveTo>
                   <a:pt x="0" y="0"/>
                 </a:moveTo>
@@ -6431,19 +6489,19 @@
               </a:extLst>
             </a:blip>
             <a:stretch>
-              <a:fillRect l="0" t="0" r="0" b="0"/>
+              <a:fillRect/>
             </a:stretch>
           </a:blipFill>
         </p:spPr>
       </p:sp>
       <p:sp>
         <p:nvSpPr>
-          <p:cNvPr name="Freeform 5" id="5"/>
+          <p:cNvPr id="5" name="Freeform 5"/>
           <p:cNvSpPr/>
           <p:nvPr/>
         </p:nvSpPr>
         <p:spPr>
-          <a:xfrm flipH="false" flipV="false" rot="0">
+          <a:xfrm>
             <a:off x="15693892" y="-1205114"/>
             <a:ext cx="4418360" cy="5651391"/>
           </a:xfrm>
@@ -6452,9 +6510,9 @@
             <a:gdLst/>
             <a:ahLst/>
             <a:cxnLst/>
-            <a:rect r="r" b="b" t="t" l="l"/>
+            <a:rect l="l" t="t" r="r" b="b"/>
             <a:pathLst>
-              <a:path h="5651391" w="4418360">
+              <a:path w="4418360" h="5651391">
                 <a:moveTo>
                   <a:pt x="0" y="0"/>
                 </a:moveTo>
@@ -6483,19 +6541,19 @@
               </a:extLst>
             </a:blip>
             <a:stretch>
-              <a:fillRect l="0" t="0" r="0" b="0"/>
+              <a:fillRect/>
             </a:stretch>
           </a:blipFill>
         </p:spPr>
       </p:sp>
       <p:sp>
         <p:nvSpPr>
-          <p:cNvPr name="TextBox 6" id="6"/>
-          <p:cNvSpPr txBox="true"/>
+          <p:cNvPr id="6" name="TextBox 6"/>
+          <p:cNvSpPr txBox="1"/>
           <p:nvPr/>
         </p:nvSpPr>
         <p:spPr>
-          <a:xfrm rot="0">
+          <a:xfrm>
             <a:off x="2954513" y="1601532"/>
             <a:ext cx="13518026" cy="1021842"/>
           </a:xfrm>
@@ -6504,7 +6562,7 @@
           </a:prstGeom>
         </p:spPr>
         <p:txBody>
-          <a:bodyPr anchor="t" rtlCol="false" tIns="0" lIns="0" bIns="0" rIns="0">
+          <a:bodyPr lIns="0" tIns="0" rIns="0" bIns="0" rtlCol="0" anchor="t">
             <a:spAutoFit/>
           </a:bodyPr>
           <a:lstStyle/>
@@ -6515,7 +6573,7 @@
               </a:lnSpc>
             </a:pPr>
             <a:r>
-              <a:rPr lang="en-US" sz="6600" b="true">
+              <a:rPr lang="en-US" sz="6600" b="1">
                 <a:solidFill>
                   <a:srgbClr val="21625D"/>
                 </a:solidFill>
@@ -6531,12 +6589,12 @@
       </p:sp>
       <p:sp>
         <p:nvSpPr>
-          <p:cNvPr name="TextBox 7" id="7"/>
-          <p:cNvSpPr txBox="true"/>
+          <p:cNvPr id="7" name="TextBox 7"/>
+          <p:cNvSpPr txBox="1"/>
           <p:nvPr/>
         </p:nvSpPr>
         <p:spPr>
-          <a:xfrm rot="0">
+          <a:xfrm>
             <a:off x="2594108" y="3216365"/>
             <a:ext cx="13099784" cy="4668117"/>
           </a:xfrm>
@@ -6545,7 +6603,7 @@
           </a:prstGeom>
         </p:spPr>
         <p:txBody>
-          <a:bodyPr anchor="t" rtlCol="false" tIns="0" lIns="0" bIns="0" rIns="0">
+          <a:bodyPr lIns="0" tIns="0" rIns="0" bIns="0" rtlCol="0" anchor="t">
             <a:spAutoFit/>
           </a:bodyPr>
           <a:lstStyle/>
@@ -6574,6 +6632,15 @@
                 <a:spcPts val="4581"/>
               </a:lnSpc>
             </a:pPr>
+            <a:endParaRPr lang="en-US" sz="3636">
+              <a:solidFill>
+                <a:srgbClr val="21625D"/>
+              </a:solidFill>
+              <a:latin typeface="Poppins"/>
+              <a:ea typeface="Poppins"/>
+              <a:cs typeface="Poppins"/>
+              <a:sym typeface="Poppins"/>
+            </a:endParaRPr>
           </a:p>
           <a:p>
             <a:pPr algn="l">
@@ -6600,9 +6667,18 @@
                 <a:spcPts val="4581"/>
               </a:lnSpc>
             </a:pPr>
-          </a:p>
-          <a:p>
-            <a:pPr algn="l" marL="785058" indent="-392529" lvl="1">
+            <a:endParaRPr lang="en-US" sz="3636">
+              <a:solidFill>
+                <a:srgbClr val="21625D"/>
+              </a:solidFill>
+              <a:latin typeface="Poppins"/>
+              <a:ea typeface="Poppins"/>
+              <a:cs typeface="Poppins"/>
+              <a:sym typeface="Poppins"/>
+            </a:endParaRPr>
+          </a:p>
+          <a:p>
+            <a:pPr marL="785058" lvl="1" indent="-392529" algn="l">
               <a:lnSpc>
                 <a:spcPts val="4581"/>
               </a:lnSpc>
@@ -6623,7 +6699,7 @@
             </a:r>
           </a:p>
           <a:p>
-            <a:pPr algn="l" marL="785058" indent="-392529" lvl="1">
+            <a:pPr marL="785058" lvl="1" indent="-392529" algn="l">
               <a:lnSpc>
                 <a:spcPts val="4581"/>
               </a:lnSpc>
@@ -6644,7 +6720,7 @@
             </a:r>
           </a:p>
           <a:p>
-            <a:pPr algn="l" marL="785058" indent="-392529" lvl="1">
+            <a:pPr marL="785058" lvl="1" indent="-392529" algn="l">
               <a:lnSpc>
                 <a:spcPts val="4581"/>
               </a:lnSpc>
@@ -6670,6 +6746,15 @@
                 <a:spcPts val="4581"/>
               </a:lnSpc>
             </a:pPr>
+            <a:endParaRPr lang="en-US" sz="3636">
+              <a:solidFill>
+                <a:srgbClr val="21625D"/>
+              </a:solidFill>
+              <a:latin typeface="Poppins"/>
+              <a:ea typeface="Poppins"/>
+              <a:cs typeface="Poppins"/>
+              <a:sym typeface="Poppins"/>
+            </a:endParaRPr>
           </a:p>
         </p:txBody>
       </p:sp>
@@ -6682,7 +6767,7 @@
 </file>
 
 <file path=ppt/slides/slide7.xml><?xml version="1.0" encoding="utf-8"?>
-<p:sld xmlns:p="http://schemas.openxmlformats.org/presentationml/2006/main" xmlns:a="http://schemas.openxmlformats.org/drawingml/2006/main" xmlns:r="http://schemas.openxmlformats.org/officeDocument/2006/relationships">
+<p:sld xmlns:a="http://schemas.openxmlformats.org/drawingml/2006/main" xmlns:r="http://schemas.openxmlformats.org/officeDocument/2006/relationships" xmlns:p="http://schemas.openxmlformats.org/presentationml/2006/main">
   <p:cSld>
     <p:spTree>
       <p:nvGrpSpPr>
@@ -6700,12 +6785,12 @@
       </p:grpSpPr>
       <p:sp>
         <p:nvSpPr>
-          <p:cNvPr name="Freeform 2" id="2"/>
+          <p:cNvPr id="2" name="Freeform 2"/>
           <p:cNvSpPr/>
           <p:nvPr/>
         </p:nvSpPr>
         <p:spPr>
-          <a:xfrm flipH="false" flipV="false" rot="0">
+          <a:xfrm>
             <a:off x="-804624" y="-1856884"/>
             <a:ext cx="4471271" cy="4738341"/>
           </a:xfrm>
@@ -6714,9 +6799,9 @@
             <a:gdLst/>
             <a:ahLst/>
             <a:cxnLst/>
-            <a:rect r="r" b="b" t="t" l="l"/>
+            <a:rect l="l" t="t" r="r" b="b"/>
             <a:pathLst>
-              <a:path h="4738341" w="4471271">
+              <a:path w="4471271" h="4738341">
                 <a:moveTo>
                   <a:pt x="0" y="0"/>
                 </a:moveTo>
@@ -6745,19 +6830,19 @@
               </a:extLst>
             </a:blip>
             <a:stretch>
-              <a:fillRect l="0" t="0" r="0" b="0"/>
+              <a:fillRect/>
             </a:stretch>
           </a:blipFill>
         </p:spPr>
       </p:sp>
       <p:sp>
         <p:nvSpPr>
-          <p:cNvPr name="Freeform 3" id="3"/>
+          <p:cNvPr id="3" name="Freeform 3"/>
           <p:cNvSpPr/>
           <p:nvPr/>
         </p:nvSpPr>
         <p:spPr>
-          <a:xfrm flipH="false" flipV="false" rot="0">
+          <a:xfrm>
             <a:off x="14306075" y="8267015"/>
             <a:ext cx="4332928" cy="4591735"/>
           </a:xfrm>
@@ -6766,9 +6851,9 @@
             <a:gdLst/>
             <a:ahLst/>
             <a:cxnLst/>
-            <a:rect r="r" b="b" t="t" l="l"/>
+            <a:rect l="l" t="t" r="r" b="b"/>
             <a:pathLst>
-              <a:path h="4591735" w="4332928">
+              <a:path w="4332928" h="4591735">
                 <a:moveTo>
                   <a:pt x="0" y="0"/>
                 </a:moveTo>
@@ -6797,19 +6882,19 @@
               </a:extLst>
             </a:blip>
             <a:stretch>
-              <a:fillRect l="0" t="0" r="0" b="0"/>
+              <a:fillRect/>
             </a:stretch>
           </a:blipFill>
         </p:spPr>
       </p:sp>
       <p:sp>
         <p:nvSpPr>
-          <p:cNvPr name="Freeform 4" id="4"/>
+          <p:cNvPr id="4" name="Freeform 4"/>
           <p:cNvSpPr/>
           <p:nvPr/>
         </p:nvSpPr>
         <p:spPr>
-          <a:xfrm flipH="false" flipV="false" rot="0">
+          <a:xfrm>
             <a:off x="-2481731" y="5907492"/>
             <a:ext cx="4366159" cy="5584622"/>
           </a:xfrm>
@@ -6818,9 +6903,9 @@
             <a:gdLst/>
             <a:ahLst/>
             <a:cxnLst/>
-            <a:rect r="r" b="b" t="t" l="l"/>
+            <a:rect l="l" t="t" r="r" b="b"/>
             <a:pathLst>
-              <a:path h="5584622" w="4366159">
+              <a:path w="4366159" h="5584622">
                 <a:moveTo>
                   <a:pt x="0" y="0"/>
                 </a:moveTo>
@@ -6849,19 +6934,19 @@
               </a:extLst>
             </a:blip>
             <a:stretch>
-              <a:fillRect l="0" t="0" r="0" b="0"/>
+              <a:fillRect/>
             </a:stretch>
           </a:blipFill>
         </p:spPr>
       </p:sp>
       <p:sp>
         <p:nvSpPr>
-          <p:cNvPr name="Freeform 5" id="5"/>
+          <p:cNvPr id="5" name="Freeform 5"/>
           <p:cNvSpPr/>
           <p:nvPr/>
         </p:nvSpPr>
         <p:spPr>
-          <a:xfrm flipH="false" flipV="false" rot="0">
+          <a:xfrm>
             <a:off x="15693892" y="-1205114"/>
             <a:ext cx="4418360" cy="5651391"/>
           </a:xfrm>
@@ -6870,9 +6955,9 @@
             <a:gdLst/>
             <a:ahLst/>
             <a:cxnLst/>
-            <a:rect r="r" b="b" t="t" l="l"/>
+            <a:rect l="l" t="t" r="r" b="b"/>
             <a:pathLst>
-              <a:path h="5651391" w="4418360">
+              <a:path w="4418360" h="5651391">
                 <a:moveTo>
                   <a:pt x="0" y="0"/>
                 </a:moveTo>
@@ -6901,19 +6986,19 @@
               </a:extLst>
             </a:blip>
             <a:stretch>
-              <a:fillRect l="0" t="0" r="0" b="0"/>
+              <a:fillRect/>
             </a:stretch>
           </a:blipFill>
         </p:spPr>
       </p:sp>
       <p:sp>
         <p:nvSpPr>
-          <p:cNvPr name="TextBox 6" id="6"/>
-          <p:cNvSpPr txBox="true"/>
+          <p:cNvPr id="6" name="TextBox 6"/>
+          <p:cNvSpPr txBox="1"/>
           <p:nvPr/>
         </p:nvSpPr>
         <p:spPr>
-          <a:xfrm rot="0">
+          <a:xfrm>
             <a:off x="3952969" y="1601532"/>
             <a:ext cx="12519570" cy="1021842"/>
           </a:xfrm>
@@ -6922,7 +7007,7 @@
           </a:prstGeom>
         </p:spPr>
         <p:txBody>
-          <a:bodyPr anchor="t" rtlCol="false" tIns="0" lIns="0" bIns="0" rIns="0">
+          <a:bodyPr lIns="0" tIns="0" rIns="0" bIns="0" rtlCol="0" anchor="t">
             <a:spAutoFit/>
           </a:bodyPr>
           <a:lstStyle/>
@@ -6933,7 +7018,7 @@
               </a:lnSpc>
             </a:pPr>
             <a:r>
-              <a:rPr lang="en-US" sz="6600" b="true">
+              <a:rPr lang="en-US" sz="6600" b="1">
                 <a:solidFill>
                   <a:srgbClr val="21625D"/>
                 </a:solidFill>
@@ -6949,12 +7034,12 @@
       </p:sp>
       <p:sp>
         <p:nvSpPr>
-          <p:cNvPr name="TextBox 7" id="7"/>
-          <p:cNvSpPr txBox="true"/>
+          <p:cNvPr id="7" name="TextBox 7"/>
+          <p:cNvSpPr txBox="1"/>
           <p:nvPr/>
         </p:nvSpPr>
         <p:spPr>
-          <a:xfrm rot="0">
+          <a:xfrm>
             <a:off x="3025564" y="3163569"/>
             <a:ext cx="12236872" cy="5421170"/>
           </a:xfrm>
@@ -6963,7 +7048,7 @@
           </a:prstGeom>
         </p:spPr>
         <p:txBody>
-          <a:bodyPr anchor="t" rtlCol="false" tIns="0" lIns="0" bIns="0" rIns="0">
+          <a:bodyPr lIns="0" tIns="0" rIns="0" bIns="0" rtlCol="0" anchor="t">
             <a:spAutoFit/>
           </a:bodyPr>
           <a:lstStyle/>
@@ -6992,6 +7077,15 @@
                 <a:spcPts val="4727"/>
               </a:lnSpc>
             </a:pPr>
+            <a:endParaRPr lang="en-US" sz="3636">
+              <a:solidFill>
+                <a:srgbClr val="21625D"/>
+              </a:solidFill>
+              <a:latin typeface="Poppins"/>
+              <a:ea typeface="Poppins"/>
+              <a:cs typeface="Poppins"/>
+              <a:sym typeface="Poppins"/>
+            </a:endParaRPr>
           </a:p>
           <a:p>
             <a:pPr algn="just">
@@ -7018,9 +7112,18 @@
                 <a:spcPts val="4727"/>
               </a:lnSpc>
             </a:pPr>
-          </a:p>
-          <a:p>
-            <a:pPr algn="just" marL="785058" indent="-392529" lvl="1">
+            <a:endParaRPr lang="en-US" sz="3636">
+              <a:solidFill>
+                <a:srgbClr val="21625D"/>
+              </a:solidFill>
+              <a:latin typeface="Poppins"/>
+              <a:ea typeface="Poppins"/>
+              <a:cs typeface="Poppins"/>
+              <a:sym typeface="Poppins"/>
+            </a:endParaRPr>
+          </a:p>
+          <a:p>
+            <a:pPr marL="785058" lvl="1" indent="-392529" algn="just">
               <a:lnSpc>
                 <a:spcPts val="4727"/>
               </a:lnSpc>
@@ -7041,7 +7144,7 @@
             </a:r>
           </a:p>
           <a:p>
-            <a:pPr algn="just" marL="785058" indent="-392529" lvl="1">
+            <a:pPr marL="785058" lvl="1" indent="-392529" algn="just">
               <a:lnSpc>
                 <a:spcPts val="4727"/>
               </a:lnSpc>
@@ -7062,7 +7165,7 @@
             </a:r>
           </a:p>
           <a:p>
-            <a:pPr algn="just" marL="785058" indent="-392529" lvl="1">
+            <a:pPr marL="785058" lvl="1" indent="-392529" algn="just">
               <a:lnSpc>
                 <a:spcPts val="4727"/>
               </a:lnSpc>
@@ -7079,19 +7182,7 @@
                 <a:cs typeface="Poppins"/>
                 <a:sym typeface="Poppins"/>
               </a:rPr>
-              <a:t>Fil</a:t>
-            </a:r>
-            <a:r>
-              <a:rPr lang="en-US" sz="3636">
-                <a:solidFill>
-                  <a:srgbClr val="21625D"/>
-                </a:solidFill>
-                <a:latin typeface="Poppins"/>
-                <a:ea typeface="Poppins"/>
-                <a:cs typeface="Poppins"/>
-                <a:sym typeface="Poppins"/>
-              </a:rPr>
-              <a:t>m edukasi</a:t>
+              <a:t>Film edukasi</a:t>
             </a:r>
           </a:p>
           <a:p>
@@ -7100,6 +7191,15 @@
                 <a:spcPts val="4727"/>
               </a:lnSpc>
             </a:pPr>
+            <a:endParaRPr lang="en-US" sz="3636">
+              <a:solidFill>
+                <a:srgbClr val="21625D"/>
+              </a:solidFill>
+              <a:latin typeface="Poppins"/>
+              <a:ea typeface="Poppins"/>
+              <a:cs typeface="Poppins"/>
+              <a:sym typeface="Poppins"/>
+            </a:endParaRPr>
           </a:p>
         </p:txBody>
       </p:sp>
@@ -7112,7 +7212,7 @@
 </file>
 
 <file path=ppt/slides/slide8.xml><?xml version="1.0" encoding="utf-8"?>
-<p:sld xmlns:p="http://schemas.openxmlformats.org/presentationml/2006/main" xmlns:a="http://schemas.openxmlformats.org/drawingml/2006/main" xmlns:r="http://schemas.openxmlformats.org/officeDocument/2006/relationships">
+<p:sld xmlns:a="http://schemas.openxmlformats.org/drawingml/2006/main" xmlns:r="http://schemas.openxmlformats.org/officeDocument/2006/relationships" xmlns:p="http://schemas.openxmlformats.org/presentationml/2006/main">
   <p:cSld>
     <p:spTree>
       <p:nvGrpSpPr>
@@ -7130,12 +7230,12 @@
       </p:grpSpPr>
       <p:sp>
         <p:nvSpPr>
-          <p:cNvPr name="Freeform 2" id="2"/>
+          <p:cNvPr id="2" name="Freeform 2"/>
           <p:cNvSpPr/>
           <p:nvPr/>
         </p:nvSpPr>
         <p:spPr>
-          <a:xfrm flipH="false" flipV="false" rot="0">
+          <a:xfrm>
             <a:off x="-804624" y="-1856884"/>
             <a:ext cx="4471271" cy="4738341"/>
           </a:xfrm>
@@ -7144,9 +7244,9 @@
             <a:gdLst/>
             <a:ahLst/>
             <a:cxnLst/>
-            <a:rect r="r" b="b" t="t" l="l"/>
+            <a:rect l="l" t="t" r="r" b="b"/>
             <a:pathLst>
-              <a:path h="4738341" w="4471271">
+              <a:path w="4471271" h="4738341">
                 <a:moveTo>
                   <a:pt x="0" y="0"/>
                 </a:moveTo>
@@ -7175,19 +7275,19 @@
               </a:extLst>
             </a:blip>
             <a:stretch>
-              <a:fillRect l="0" t="0" r="0" b="0"/>
+              <a:fillRect/>
             </a:stretch>
           </a:blipFill>
         </p:spPr>
       </p:sp>
       <p:sp>
         <p:nvSpPr>
-          <p:cNvPr name="Freeform 3" id="3"/>
+          <p:cNvPr id="3" name="Freeform 3"/>
           <p:cNvSpPr/>
           <p:nvPr/>
         </p:nvSpPr>
         <p:spPr>
-          <a:xfrm flipH="false" flipV="false" rot="0">
+          <a:xfrm>
             <a:off x="14306075" y="8267015"/>
             <a:ext cx="4332928" cy="4591735"/>
           </a:xfrm>
@@ -7196,9 +7296,9 @@
             <a:gdLst/>
             <a:ahLst/>
             <a:cxnLst/>
-            <a:rect r="r" b="b" t="t" l="l"/>
+            <a:rect l="l" t="t" r="r" b="b"/>
             <a:pathLst>
-              <a:path h="4591735" w="4332928">
+              <a:path w="4332928" h="4591735">
                 <a:moveTo>
                   <a:pt x="0" y="0"/>
                 </a:moveTo>
@@ -7227,19 +7327,19 @@
               </a:extLst>
             </a:blip>
             <a:stretch>
-              <a:fillRect l="0" t="0" r="0" b="0"/>
+              <a:fillRect/>
             </a:stretch>
           </a:blipFill>
         </p:spPr>
       </p:sp>
       <p:sp>
         <p:nvSpPr>
-          <p:cNvPr name="Freeform 4" id="4"/>
+          <p:cNvPr id="4" name="Freeform 4"/>
           <p:cNvSpPr/>
           <p:nvPr/>
         </p:nvSpPr>
         <p:spPr>
-          <a:xfrm flipH="false" flipV="false" rot="0">
+          <a:xfrm>
             <a:off x="-2481731" y="5907492"/>
             <a:ext cx="4366159" cy="5584622"/>
           </a:xfrm>
@@ -7248,9 +7348,9 @@
             <a:gdLst/>
             <a:ahLst/>
             <a:cxnLst/>
-            <a:rect r="r" b="b" t="t" l="l"/>
+            <a:rect l="l" t="t" r="r" b="b"/>
             <a:pathLst>
-              <a:path h="5584622" w="4366159">
+              <a:path w="4366159" h="5584622">
                 <a:moveTo>
                   <a:pt x="0" y="0"/>
                 </a:moveTo>
@@ -7279,19 +7379,19 @@
               </a:extLst>
             </a:blip>
             <a:stretch>
-              <a:fillRect l="0" t="0" r="0" b="0"/>
+              <a:fillRect/>
             </a:stretch>
           </a:blipFill>
         </p:spPr>
       </p:sp>
       <p:sp>
         <p:nvSpPr>
-          <p:cNvPr name="Freeform 5" id="5"/>
+          <p:cNvPr id="5" name="Freeform 5"/>
           <p:cNvSpPr/>
           <p:nvPr/>
         </p:nvSpPr>
         <p:spPr>
-          <a:xfrm flipH="false" flipV="false" rot="0">
+          <a:xfrm>
             <a:off x="15693892" y="-1205114"/>
             <a:ext cx="4418360" cy="5651391"/>
           </a:xfrm>
@@ -7300,9 +7400,9 @@
             <a:gdLst/>
             <a:ahLst/>
             <a:cxnLst/>
-            <a:rect r="r" b="b" t="t" l="l"/>
+            <a:rect l="l" t="t" r="r" b="b"/>
             <a:pathLst>
-              <a:path h="5651391" w="4418360">
+              <a:path w="4418360" h="5651391">
                 <a:moveTo>
                   <a:pt x="0" y="0"/>
                 </a:moveTo>
@@ -7331,19 +7431,19 @@
               </a:extLst>
             </a:blip>
             <a:stretch>
-              <a:fillRect l="0" t="0" r="0" b="0"/>
+              <a:fillRect/>
             </a:stretch>
           </a:blipFill>
         </p:spPr>
       </p:sp>
       <p:sp>
         <p:nvSpPr>
-          <p:cNvPr name="TextBox 6" id="6"/>
-          <p:cNvSpPr txBox="true"/>
+          <p:cNvPr id="6" name="TextBox 6"/>
+          <p:cNvSpPr txBox="1"/>
           <p:nvPr/>
         </p:nvSpPr>
         <p:spPr>
-          <a:xfrm rot="0">
+          <a:xfrm>
             <a:off x="3035496" y="1601532"/>
             <a:ext cx="12217008" cy="1021842"/>
           </a:xfrm>
@@ -7352,7 +7452,7 @@
           </a:prstGeom>
         </p:spPr>
         <p:txBody>
-          <a:bodyPr anchor="t" rtlCol="false" tIns="0" lIns="0" bIns="0" rIns="0">
+          <a:bodyPr lIns="0" tIns="0" rIns="0" bIns="0" rtlCol="0" anchor="t">
             <a:spAutoFit/>
           </a:bodyPr>
           <a:lstStyle/>
@@ -7363,7 +7463,7 @@
               </a:lnSpc>
             </a:pPr>
             <a:r>
-              <a:rPr lang="en-US" b="true" sz="6600">
+              <a:rPr lang="en-US" sz="6600" b="1">
                 <a:solidFill>
                   <a:srgbClr val="21625D"/>
                 </a:solidFill>
@@ -7379,12 +7479,12 @@
       </p:sp>
       <p:sp>
         <p:nvSpPr>
-          <p:cNvPr name="TextBox 7" id="7"/>
-          <p:cNvSpPr txBox="true"/>
+          <p:cNvPr id="7" name="TextBox 7"/>
+          <p:cNvSpPr txBox="1"/>
           <p:nvPr/>
         </p:nvSpPr>
         <p:spPr>
-          <a:xfrm rot="0">
+          <a:xfrm>
             <a:off x="2626309" y="3489873"/>
             <a:ext cx="13035383" cy="5330538"/>
           </a:xfrm>
@@ -7393,7 +7493,7 @@
           </a:prstGeom>
         </p:spPr>
         <p:txBody>
-          <a:bodyPr anchor="t" rtlCol="false" tIns="0" lIns="0" bIns="0" rIns="0">
+          <a:bodyPr lIns="0" tIns="0" rIns="0" bIns="0" rtlCol="0" anchor="t">
             <a:spAutoFit/>
           </a:bodyPr>
           <a:lstStyle/>
@@ -7422,6 +7522,15 @@
                 <a:spcPts val="4690"/>
               </a:lnSpc>
             </a:pPr>
+            <a:endParaRPr lang="en-US" sz="3636">
+              <a:solidFill>
+                <a:srgbClr val="21625D"/>
+              </a:solidFill>
+              <a:latin typeface="Poppins"/>
+              <a:ea typeface="Poppins"/>
+              <a:cs typeface="Poppins"/>
+              <a:sym typeface="Poppins"/>
+            </a:endParaRPr>
           </a:p>
           <a:p>
             <a:pPr algn="just">
@@ -7448,9 +7557,18 @@
                 <a:spcPts val="4690"/>
               </a:lnSpc>
             </a:pPr>
-          </a:p>
-          <a:p>
-            <a:pPr algn="just" marL="785058" indent="-392529" lvl="1">
+            <a:endParaRPr lang="en-US" sz="3636">
+              <a:solidFill>
+                <a:srgbClr val="21625D"/>
+              </a:solidFill>
+              <a:latin typeface="Poppins"/>
+              <a:ea typeface="Poppins"/>
+              <a:cs typeface="Poppins"/>
+              <a:sym typeface="Poppins"/>
+            </a:endParaRPr>
+          </a:p>
+          <a:p>
+            <a:pPr marL="785058" lvl="1" indent="-392529" algn="just">
               <a:lnSpc>
                 <a:spcPts val="4690"/>
               </a:lnSpc>
@@ -7471,7 +7589,7 @@
             </a:r>
           </a:p>
           <a:p>
-            <a:pPr algn="just" marL="785058" indent="-392529" lvl="1">
+            <a:pPr marL="785058" lvl="1" indent="-392529" algn="just">
               <a:lnSpc>
                 <a:spcPts val="4690"/>
               </a:lnSpc>
@@ -7492,7 +7610,7 @@
             </a:r>
           </a:p>
           <a:p>
-            <a:pPr algn="just" marL="785058" indent="-392529" lvl="1">
+            <a:pPr marL="785058" lvl="1" indent="-392529" algn="just">
               <a:lnSpc>
                 <a:spcPts val="4690"/>
               </a:lnSpc>
@@ -7513,7 +7631,7 @@
             </a:r>
           </a:p>
           <a:p>
-            <a:pPr algn="just" marL="785058" indent="-392529" lvl="1">
+            <a:pPr marL="785058" lvl="1" indent="-392529" algn="just">
               <a:lnSpc>
                 <a:spcPts val="4690"/>
               </a:lnSpc>
@@ -7539,6 +7657,15 @@
                 <a:spcPts val="4690"/>
               </a:lnSpc>
             </a:pPr>
+            <a:endParaRPr lang="en-US" sz="3636">
+              <a:solidFill>
+                <a:srgbClr val="21625D"/>
+              </a:solidFill>
+              <a:latin typeface="Poppins"/>
+              <a:ea typeface="Poppins"/>
+              <a:cs typeface="Poppins"/>
+              <a:sym typeface="Poppins"/>
+            </a:endParaRPr>
           </a:p>
         </p:txBody>
       </p:sp>
@@ -7551,7 +7678,7 @@
 </file>
 
 <file path=ppt/slides/slide9.xml><?xml version="1.0" encoding="utf-8"?>
-<p:sld xmlns:p="http://schemas.openxmlformats.org/presentationml/2006/main" xmlns:a="http://schemas.openxmlformats.org/drawingml/2006/main" xmlns:r="http://schemas.openxmlformats.org/officeDocument/2006/relationships">
+<p:sld xmlns:a="http://schemas.openxmlformats.org/drawingml/2006/main" xmlns:r="http://schemas.openxmlformats.org/officeDocument/2006/relationships" xmlns:p="http://schemas.openxmlformats.org/presentationml/2006/main">
   <p:cSld>
     <p:spTree>
       <p:nvGrpSpPr>
@@ -7569,12 +7696,12 @@
       </p:grpSpPr>
       <p:sp>
         <p:nvSpPr>
-          <p:cNvPr name="Freeform 2" id="2"/>
+          <p:cNvPr id="2" name="Freeform 2"/>
           <p:cNvSpPr/>
           <p:nvPr/>
         </p:nvSpPr>
         <p:spPr>
-          <a:xfrm flipH="false" flipV="false" rot="0">
+          <a:xfrm>
             <a:off x="-804624" y="-1856884"/>
             <a:ext cx="4471271" cy="4738341"/>
           </a:xfrm>
@@ -7583,9 +7710,9 @@
             <a:gdLst/>
             <a:ahLst/>
             <a:cxnLst/>
-            <a:rect r="r" b="b" t="t" l="l"/>
+            <a:rect l="l" t="t" r="r" b="b"/>
             <a:pathLst>
-              <a:path h="4738341" w="4471271">
+              <a:path w="4471271" h="4738341">
                 <a:moveTo>
                   <a:pt x="0" y="0"/>
                 </a:moveTo>
@@ -7614,19 +7741,19 @@
               </a:extLst>
             </a:blip>
             <a:stretch>
-              <a:fillRect l="0" t="0" r="0" b="0"/>
+              <a:fillRect/>
             </a:stretch>
           </a:blipFill>
         </p:spPr>
       </p:sp>
       <p:sp>
         <p:nvSpPr>
-          <p:cNvPr name="Freeform 3" id="3"/>
+          <p:cNvPr id="3" name="Freeform 3"/>
           <p:cNvSpPr/>
           <p:nvPr/>
         </p:nvSpPr>
         <p:spPr>
-          <a:xfrm flipH="false" flipV="false" rot="0">
+          <a:xfrm>
             <a:off x="14306075" y="8267015"/>
             <a:ext cx="4332928" cy="4591735"/>
           </a:xfrm>
@@ -7635,9 +7762,9 @@
             <a:gdLst/>
             <a:ahLst/>
             <a:cxnLst/>
-            <a:rect r="r" b="b" t="t" l="l"/>
+            <a:rect l="l" t="t" r="r" b="b"/>
             <a:pathLst>
-              <a:path h="4591735" w="4332928">
+              <a:path w="4332928" h="4591735">
                 <a:moveTo>
                   <a:pt x="0" y="0"/>
                 </a:moveTo>
@@ -7666,19 +7793,19 @@
               </a:extLst>
             </a:blip>
             <a:stretch>
-              <a:fillRect l="0" t="0" r="0" b="0"/>
+              <a:fillRect/>
             </a:stretch>
           </a:blipFill>
         </p:spPr>
       </p:sp>
       <p:sp>
         <p:nvSpPr>
-          <p:cNvPr name="TextBox 4" id="4"/>
-          <p:cNvSpPr txBox="true"/>
+          <p:cNvPr id="4" name="TextBox 4"/>
+          <p:cNvSpPr txBox="1"/>
           <p:nvPr/>
         </p:nvSpPr>
         <p:spPr>
-          <a:xfrm rot="0">
+          <a:xfrm>
             <a:off x="4801760" y="1859615"/>
             <a:ext cx="8684479" cy="1021842"/>
           </a:xfrm>
@@ -7687,7 +7814,7 @@
           </a:prstGeom>
         </p:spPr>
         <p:txBody>
-          <a:bodyPr anchor="t" rtlCol="false" tIns="0" lIns="0" bIns="0" rIns="0">
+          <a:bodyPr lIns="0" tIns="0" rIns="0" bIns="0" rtlCol="0" anchor="t">
             <a:spAutoFit/>
           </a:bodyPr>
           <a:lstStyle/>
@@ -7698,7 +7825,7 @@
               </a:lnSpc>
             </a:pPr>
             <a:r>
-              <a:rPr lang="en-US" b="true" sz="6600">
+              <a:rPr lang="en-US" sz="6600" b="1">
                 <a:solidFill>
                   <a:srgbClr val="21625D"/>
                 </a:solidFill>
@@ -7714,12 +7841,12 @@
       </p:sp>
       <p:sp>
         <p:nvSpPr>
-          <p:cNvPr name="Freeform 5" id="5"/>
+          <p:cNvPr id="5" name="Freeform 5"/>
           <p:cNvSpPr/>
           <p:nvPr/>
         </p:nvSpPr>
         <p:spPr>
-          <a:xfrm flipH="false" flipV="false" rot="0">
+          <a:xfrm>
             <a:off x="-2481731" y="5907492"/>
             <a:ext cx="4366159" cy="5584622"/>
           </a:xfrm>
@@ -7728,9 +7855,9 @@
             <a:gdLst/>
             <a:ahLst/>
             <a:cxnLst/>
-            <a:rect r="r" b="b" t="t" l="l"/>
+            <a:rect l="l" t="t" r="r" b="b"/>
             <a:pathLst>
-              <a:path h="5584622" w="4366159">
+              <a:path w="4366159" h="5584622">
                 <a:moveTo>
                   <a:pt x="0" y="0"/>
                 </a:moveTo>
@@ -7759,19 +7886,19 @@
               </a:extLst>
             </a:blip>
             <a:stretch>
-              <a:fillRect l="0" t="0" r="0" b="0"/>
+              <a:fillRect/>
             </a:stretch>
           </a:blipFill>
         </p:spPr>
       </p:sp>
       <p:sp>
         <p:nvSpPr>
-          <p:cNvPr name="Freeform 6" id="6"/>
+          <p:cNvPr id="6" name="Freeform 6"/>
           <p:cNvSpPr/>
           <p:nvPr/>
         </p:nvSpPr>
         <p:spPr>
-          <a:xfrm flipH="false" flipV="false" rot="0">
+          <a:xfrm>
             <a:off x="15693892" y="-1205114"/>
             <a:ext cx="4418360" cy="5651391"/>
           </a:xfrm>
@@ -7780,9 +7907,9 @@
             <a:gdLst/>
             <a:ahLst/>
             <a:cxnLst/>
-            <a:rect r="r" b="b" t="t" l="l"/>
+            <a:rect l="l" t="t" r="r" b="b"/>
             <a:pathLst>
-              <a:path h="5651391" w="4418360">
+              <a:path w="4418360" h="5651391">
                 <a:moveTo>
                   <a:pt x="0" y="0"/>
                 </a:moveTo>
@@ -7811,19 +7938,19 @@
               </a:extLst>
             </a:blip>
             <a:stretch>
-              <a:fillRect l="0" t="0" r="0" b="0"/>
+              <a:fillRect/>
             </a:stretch>
           </a:blipFill>
         </p:spPr>
       </p:sp>
       <p:sp>
         <p:nvSpPr>
-          <p:cNvPr name="TextBox 7" id="7"/>
-          <p:cNvSpPr txBox="true"/>
+          <p:cNvPr id="7" name="TextBox 7"/>
+          <p:cNvSpPr txBox="1"/>
           <p:nvPr/>
         </p:nvSpPr>
         <p:spPr>
-          <a:xfrm rot="0">
+          <a:xfrm>
             <a:off x="2658509" y="3379902"/>
             <a:ext cx="13035383" cy="4969455"/>
           </a:xfrm>
@@ -7832,7 +7959,7 @@
           </a:prstGeom>
         </p:spPr>
         <p:txBody>
-          <a:bodyPr anchor="t" rtlCol="false" tIns="0" lIns="0" bIns="0" rIns="0">
+          <a:bodyPr lIns="0" tIns="0" rIns="0" bIns="0" rtlCol="0" anchor="t">
             <a:spAutoFit/>
           </a:bodyPr>
           <a:lstStyle/>
@@ -7861,6 +7988,15 @@
                 <a:spcPts val="4908"/>
               </a:lnSpc>
             </a:pPr>
+            <a:endParaRPr lang="en-US" sz="3636">
+              <a:solidFill>
+                <a:srgbClr val="21625D"/>
+              </a:solidFill>
+              <a:latin typeface="Poppins"/>
+              <a:ea typeface="Poppins"/>
+              <a:cs typeface="Poppins"/>
+              <a:sym typeface="Poppins"/>
+            </a:endParaRPr>
           </a:p>
           <a:p>
             <a:pPr algn="just">
@@ -7887,9 +8023,18 @@
                 <a:spcPts val="4908"/>
               </a:lnSpc>
             </a:pPr>
-          </a:p>
-          <a:p>
-            <a:pPr algn="just" marL="785058" indent="-392529" lvl="1">
+            <a:endParaRPr lang="en-US" sz="3636">
+              <a:solidFill>
+                <a:srgbClr val="21625D"/>
+              </a:solidFill>
+              <a:latin typeface="Poppins"/>
+              <a:ea typeface="Poppins"/>
+              <a:cs typeface="Poppins"/>
+              <a:sym typeface="Poppins"/>
+            </a:endParaRPr>
+          </a:p>
+          <a:p>
+            <a:pPr marL="785058" lvl="1" indent="-392529" algn="just">
               <a:lnSpc>
                 <a:spcPts val="4908"/>
               </a:lnSpc>
@@ -7906,8 +8051,17 @@
                 <a:cs typeface="Poppins"/>
                 <a:sym typeface="Poppins"/>
               </a:rPr>
-              <a:t>Rol</a:t>
-            </a:r>
+              <a:t>Role play (jual beli)</a:t>
+            </a:r>
+          </a:p>
+          <a:p>
+            <a:pPr marL="785058" lvl="1" indent="-392529" algn="just">
+              <a:lnSpc>
+                <a:spcPts val="4908"/>
+              </a:lnSpc>
+              <a:buFont typeface="Arial"/>
+              <a:buChar char="•"/>
+            </a:pPr>
             <a:r>
               <a:rPr lang="en-US" sz="3636">
                 <a:solidFill>
@@ -7918,44 +8072,11 @@
                 <a:cs typeface="Poppins"/>
                 <a:sym typeface="Poppins"/>
               </a:rPr>
-              <a:t>e play (jual beli)</a:t>
-            </a:r>
-          </a:p>
-          <a:p>
-            <a:pPr algn="just" marL="785058" indent="-392529" lvl="1">
-              <a:lnSpc>
-                <a:spcPts val="4908"/>
-              </a:lnSpc>
-              <a:buFont typeface="Arial"/>
-              <a:buChar char="•"/>
-            </a:pPr>
-            <a:r>
-              <a:rPr lang="en-US" sz="3636">
-                <a:solidFill>
-                  <a:srgbClr val="21625D"/>
-                </a:solidFill>
-                <a:latin typeface="Poppins"/>
-                <a:ea typeface="Poppins"/>
-                <a:cs typeface="Poppins"/>
-                <a:sym typeface="Poppins"/>
-              </a:rPr>
-              <a:t>Si</a:t>
-            </a:r>
-            <a:r>
-              <a:rPr lang="en-US" sz="3636">
-                <a:solidFill>
-                  <a:srgbClr val="21625D"/>
-                </a:solidFill>
-                <a:latin typeface="Poppins"/>
-                <a:ea typeface="Poppins"/>
-                <a:cs typeface="Poppins"/>
-                <a:sym typeface="Poppins"/>
-              </a:rPr>
-              <a:t>mulasi pasar</a:t>
-            </a:r>
-          </a:p>
-          <a:p>
-            <a:pPr algn="just" marL="785058" indent="-392529" lvl="1">
+              <a:t>Simulasi pasar</a:t>
+            </a:r>
+          </a:p>
+          <a:p>
+            <a:pPr marL="785058" lvl="1" indent="-392529" algn="just">
               <a:lnSpc>
                 <a:spcPts val="4908"/>
               </a:lnSpc>
@@ -7981,6 +8102,15 @@
                 <a:spcPts val="4908"/>
               </a:lnSpc>
             </a:pPr>
+            <a:endParaRPr lang="en-US" sz="3636">
+              <a:solidFill>
+                <a:srgbClr val="21625D"/>
+              </a:solidFill>
+              <a:latin typeface="Poppins"/>
+              <a:ea typeface="Poppins"/>
+              <a:cs typeface="Poppins"/>
+              <a:sym typeface="Poppins"/>
+            </a:endParaRPr>
           </a:p>
         </p:txBody>
       </p:sp>
